--- a/docs/pptx/auc3/ritu-auc3-linsubhr-ratio-throm2_10pct.pptx
+++ b/docs/pptx/auc3/ritu-auc3-linsubhr-ratio-throm2_10pct.pptx
@@ -2443,7 +2443,7 @@
           </p:nvSpPr>
           <p:spPr>
             <a:xfrm>
-              <a:off x="1012387" y="2073503"/>
+              <a:off x="1013326" y="2073503"/>
               <a:ext cx="0" cy="3649639"/>
             </a:xfrm>
             <a:custGeom>
@@ -2486,7 +2486,7 @@
           </p:nvSpPr>
           <p:spPr>
             <a:xfrm>
-              <a:off x="1914572" y="2073503"/>
+              <a:off x="1915271" y="2073503"/>
               <a:ext cx="0" cy="3649639"/>
             </a:xfrm>
             <a:custGeom>
@@ -2529,7 +2529,7 @@
           </p:nvSpPr>
           <p:spPr>
             <a:xfrm>
-              <a:off x="2816756" y="2073503"/>
+              <a:off x="2817216" y="2073503"/>
               <a:ext cx="0" cy="3649639"/>
             </a:xfrm>
             <a:custGeom>
@@ -2572,7 +2572,7 @@
           </p:nvSpPr>
           <p:spPr>
             <a:xfrm>
-              <a:off x="3718941" y="2073503"/>
+              <a:off x="3719160" y="2073503"/>
               <a:ext cx="0" cy="3649639"/>
             </a:xfrm>
             <a:custGeom>
@@ -2615,7 +2615,7 @@
           </p:nvSpPr>
           <p:spPr>
             <a:xfrm>
-              <a:off x="4621125" y="2073503"/>
+              <a:off x="4621105" y="2073503"/>
               <a:ext cx="0" cy="3649639"/>
             </a:xfrm>
             <a:custGeom>
@@ -2658,7 +2658,7 @@
           </p:nvSpPr>
           <p:spPr>
             <a:xfrm>
-              <a:off x="5523310" y="2073503"/>
+              <a:off x="5523050" y="2073503"/>
               <a:ext cx="0" cy="3649639"/>
             </a:xfrm>
             <a:custGeom>
@@ -2701,7 +2701,7 @@
           </p:nvSpPr>
           <p:spPr>
             <a:xfrm>
-              <a:off x="6425495" y="2073503"/>
+              <a:off x="6424995" y="2073503"/>
               <a:ext cx="0" cy="3649639"/>
             </a:xfrm>
             <a:custGeom>
@@ -2744,7 +2744,7 @@
           </p:nvSpPr>
           <p:spPr>
             <a:xfrm>
-              <a:off x="7327679" y="2073503"/>
+              <a:off x="7326940" y="2073503"/>
               <a:ext cx="0" cy="3649639"/>
             </a:xfrm>
             <a:custGeom>
@@ -2787,7 +2787,7 @@
           </p:nvSpPr>
           <p:spPr>
             <a:xfrm>
-              <a:off x="8229864" y="2073503"/>
+              <a:off x="8228885" y="2073503"/>
               <a:ext cx="0" cy="3649639"/>
             </a:xfrm>
             <a:custGeom>
@@ -3045,7 +3045,7 @@
           </p:nvSpPr>
           <p:spPr>
             <a:xfrm>
-              <a:off x="1463479" y="2073503"/>
+              <a:off x="1464298" y="2073503"/>
               <a:ext cx="0" cy="3649639"/>
             </a:xfrm>
             <a:custGeom>
@@ -3088,7 +3088,7 @@
           </p:nvSpPr>
           <p:spPr>
             <a:xfrm>
-              <a:off x="2365664" y="2073503"/>
+              <a:off x="2366243" y="2073503"/>
               <a:ext cx="0" cy="3649639"/>
             </a:xfrm>
             <a:custGeom>
@@ -3131,7 +3131,7 @@
           </p:nvSpPr>
           <p:spPr>
             <a:xfrm>
-              <a:off x="3267849" y="2073503"/>
+              <a:off x="3268188" y="2073503"/>
               <a:ext cx="0" cy="3649639"/>
             </a:xfrm>
             <a:custGeom>
@@ -3174,7 +3174,7 @@
           </p:nvSpPr>
           <p:spPr>
             <a:xfrm>
-              <a:off x="4170033" y="2073503"/>
+              <a:off x="4170133" y="2073503"/>
               <a:ext cx="0" cy="3649639"/>
             </a:xfrm>
             <a:custGeom>
@@ -3217,7 +3217,7 @@
           </p:nvSpPr>
           <p:spPr>
             <a:xfrm>
-              <a:off x="5072218" y="2073503"/>
+              <a:off x="5072078" y="2073503"/>
               <a:ext cx="0" cy="3649639"/>
             </a:xfrm>
             <a:custGeom>
@@ -3260,7 +3260,7 @@
           </p:nvSpPr>
           <p:spPr>
             <a:xfrm>
-              <a:off x="5974402" y="2073503"/>
+              <a:off x="5974022" y="2073503"/>
               <a:ext cx="0" cy="3649639"/>
             </a:xfrm>
             <a:custGeom>
@@ -3303,7 +3303,7 @@
           </p:nvSpPr>
           <p:spPr>
             <a:xfrm>
-              <a:off x="6876587" y="2073503"/>
+              <a:off x="6875967" y="2073503"/>
               <a:ext cx="0" cy="3649639"/>
             </a:xfrm>
             <a:custGeom>
@@ -3346,7 +3346,7 @@
           </p:nvSpPr>
           <p:spPr>
             <a:xfrm>
-              <a:off x="7778772" y="2073503"/>
+              <a:off x="7777912" y="2073503"/>
               <a:ext cx="0" cy="3649639"/>
             </a:xfrm>
             <a:custGeom>
@@ -3390,485 +3390,485 @@
           <p:spPr>
             <a:xfrm>
               <a:off x="1172049" y="2073503"/>
-              <a:ext cx="7090630" cy="3435765"/>
+              <a:ext cx="7090630" cy="3436041"/>
             </a:xfrm>
             <a:custGeom>
               <a:avLst/>
               <a:pathLst>
-                <a:path w="7090630" h="3435765">
+                <a:path w="7090630" h="3436041">
                   <a:moveTo>
-                    <a:pt x="513437" y="0"/>
+                    <a:pt x="519435" y="0"/>
                   </a:moveTo>
                   <a:lnTo>
-                    <a:pt x="572980" y="118407"/>
-                  </a:lnTo>
-                  <a:lnTo>
-                    <a:pt x="644602" y="255054"/>
-                  </a:lnTo>
-                  <a:lnTo>
-                    <a:pt x="716225" y="386153"/>
-                  </a:lnTo>
-                  <a:lnTo>
-                    <a:pt x="787847" y="511929"/>
-                  </a:lnTo>
-                  <a:lnTo>
-                    <a:pt x="859470" y="632597"/>
-                  </a:lnTo>
-                  <a:lnTo>
-                    <a:pt x="931092" y="748366"/>
-                  </a:lnTo>
-                  <a:lnTo>
-                    <a:pt x="1002715" y="859434"/>
-                  </a:lnTo>
-                  <a:lnTo>
-                    <a:pt x="1074337" y="965993"/>
-                  </a:lnTo>
-                  <a:lnTo>
-                    <a:pt x="1145960" y="1068224"/>
-                  </a:lnTo>
-                  <a:lnTo>
-                    <a:pt x="1217582" y="1166305"/>
-                  </a:lnTo>
-                  <a:lnTo>
-                    <a:pt x="1289205" y="1260403"/>
-                  </a:lnTo>
-                  <a:lnTo>
-                    <a:pt x="1360827" y="1350680"/>
-                  </a:lnTo>
-                  <a:lnTo>
-                    <a:pt x="1432450" y="1437292"/>
-                  </a:lnTo>
-                  <a:lnTo>
-                    <a:pt x="1504073" y="1520387"/>
-                  </a:lnTo>
-                  <a:lnTo>
-                    <a:pt x="1575695" y="1600107"/>
-                  </a:lnTo>
-                  <a:lnTo>
-                    <a:pt x="1647318" y="1676591"/>
-                  </a:lnTo>
-                  <a:lnTo>
-                    <a:pt x="1718940" y="1749970"/>
-                  </a:lnTo>
-                  <a:lnTo>
-                    <a:pt x="1790563" y="1820368"/>
-                  </a:lnTo>
-                  <a:lnTo>
-                    <a:pt x="1862185" y="1887909"/>
-                  </a:lnTo>
-                  <a:lnTo>
-                    <a:pt x="1933808" y="1952706"/>
-                  </a:lnTo>
-                  <a:lnTo>
-                    <a:pt x="2005430" y="2014873"/>
-                  </a:lnTo>
-                  <a:lnTo>
-                    <a:pt x="2077053" y="2074516"/>
-                  </a:lnTo>
-                  <a:lnTo>
-                    <a:pt x="2148675" y="2131737"/>
-                  </a:lnTo>
-                  <a:lnTo>
-                    <a:pt x="2220298" y="2186634"/>
-                  </a:lnTo>
-                  <a:lnTo>
-                    <a:pt x="2291920" y="2239302"/>
-                  </a:lnTo>
-                  <a:lnTo>
-                    <a:pt x="2363543" y="2289832"/>
-                  </a:lnTo>
-                  <a:lnTo>
-                    <a:pt x="2435165" y="2338310"/>
-                  </a:lnTo>
-                  <a:lnTo>
-                    <a:pt x="2506788" y="2384820"/>
-                  </a:lnTo>
-                  <a:lnTo>
-                    <a:pt x="2578410" y="2429441"/>
-                  </a:lnTo>
-                  <a:lnTo>
-                    <a:pt x="2650033" y="2472250"/>
-                  </a:lnTo>
-                  <a:lnTo>
-                    <a:pt x="2721655" y="2513321"/>
-                  </a:lnTo>
-                  <a:lnTo>
-                    <a:pt x="2793278" y="2552725"/>
-                  </a:lnTo>
-                  <a:lnTo>
-                    <a:pt x="2864901" y="2590528"/>
-                  </a:lnTo>
-                  <a:lnTo>
-                    <a:pt x="2936523" y="2626797"/>
-                  </a:lnTo>
-                  <a:lnTo>
-                    <a:pt x="3008146" y="2642114"/>
-                  </a:lnTo>
-                  <a:lnTo>
-                    <a:pt x="3079768" y="2582710"/>
-                  </a:lnTo>
-                  <a:lnTo>
-                    <a:pt x="3151391" y="2519112"/>
-                  </a:lnTo>
-                  <a:lnTo>
-                    <a:pt x="3223013" y="2451026"/>
-                  </a:lnTo>
-                  <a:lnTo>
-                    <a:pt x="3294636" y="2378134"/>
-                  </a:lnTo>
-                  <a:lnTo>
-                    <a:pt x="3366258" y="2300097"/>
-                  </a:lnTo>
-                  <a:lnTo>
-                    <a:pt x="3437881" y="2216552"/>
-                  </a:lnTo>
-                  <a:lnTo>
-                    <a:pt x="3509503" y="2127110"/>
-                  </a:lnTo>
-                  <a:lnTo>
-                    <a:pt x="3581126" y="2031356"/>
-                  </a:lnTo>
-                  <a:lnTo>
-                    <a:pt x="3652748" y="1928842"/>
-                  </a:lnTo>
-                  <a:lnTo>
-                    <a:pt x="3724371" y="1819093"/>
-                  </a:lnTo>
-                  <a:lnTo>
-                    <a:pt x="3795993" y="1701598"/>
-                  </a:lnTo>
-                  <a:lnTo>
-                    <a:pt x="3867616" y="1575810"/>
-                  </a:lnTo>
-                  <a:lnTo>
-                    <a:pt x="3939238" y="1441143"/>
-                  </a:lnTo>
-                  <a:lnTo>
-                    <a:pt x="4010861" y="1296971"/>
-                  </a:lnTo>
-                  <a:lnTo>
-                    <a:pt x="4082483" y="1142623"/>
-                  </a:lnTo>
-                  <a:lnTo>
-                    <a:pt x="4154106" y="977380"/>
-                  </a:lnTo>
-                  <a:lnTo>
-                    <a:pt x="4225729" y="800475"/>
-                  </a:lnTo>
-                  <a:lnTo>
-                    <a:pt x="4297351" y="611083"/>
-                  </a:lnTo>
-                  <a:lnTo>
-                    <a:pt x="4368974" y="408323"/>
-                  </a:lnTo>
-                  <a:lnTo>
-                    <a:pt x="4440596" y="191252"/>
-                  </a:lnTo>
-                  <a:lnTo>
-                    <a:pt x="4499540" y="0"/>
+                    <a:pt x="572980" y="106874"/>
+                  </a:lnTo>
+                  <a:lnTo>
+                    <a:pt x="644602" y="244025"/>
+                  </a:lnTo>
+                  <a:lnTo>
+                    <a:pt x="716225" y="375606"/>
+                  </a:lnTo>
+                  <a:lnTo>
+                    <a:pt x="787847" y="501843"/>
+                  </a:lnTo>
+                  <a:lnTo>
+                    <a:pt x="859470" y="622952"/>
+                  </a:lnTo>
+                  <a:lnTo>
+                    <a:pt x="931092" y="739143"/>
+                  </a:lnTo>
+                  <a:lnTo>
+                    <a:pt x="1002715" y="850614"/>
+                  </a:lnTo>
+                  <a:lnTo>
+                    <a:pt x="1074337" y="957558"/>
+                  </a:lnTo>
+                  <a:lnTo>
+                    <a:pt x="1145960" y="1060159"/>
+                  </a:lnTo>
+                  <a:lnTo>
+                    <a:pt x="1217582" y="1158592"/>
+                  </a:lnTo>
+                  <a:lnTo>
+                    <a:pt x="1289205" y="1253028"/>
+                  </a:lnTo>
+                  <a:lnTo>
+                    <a:pt x="1360827" y="1343628"/>
+                  </a:lnTo>
+                  <a:lnTo>
+                    <a:pt x="1432450" y="1430549"/>
+                  </a:lnTo>
+                  <a:lnTo>
+                    <a:pt x="1504073" y="1513939"/>
+                  </a:lnTo>
+                  <a:lnTo>
+                    <a:pt x="1575695" y="1593942"/>
+                  </a:lnTo>
+                  <a:lnTo>
+                    <a:pt x="1647318" y="1670696"/>
+                  </a:lnTo>
+                  <a:lnTo>
+                    <a:pt x="1718940" y="1744333"/>
+                  </a:lnTo>
+                  <a:lnTo>
+                    <a:pt x="1790563" y="1814979"/>
+                  </a:lnTo>
+                  <a:lnTo>
+                    <a:pt x="1862185" y="1882755"/>
+                  </a:lnTo>
+                  <a:lnTo>
+                    <a:pt x="1933808" y="1947779"/>
+                  </a:lnTo>
+                  <a:lnTo>
+                    <a:pt x="2005430" y="2010162"/>
+                  </a:lnTo>
+                  <a:lnTo>
+                    <a:pt x="2077053" y="2070012"/>
+                  </a:lnTo>
+                  <a:lnTo>
+                    <a:pt x="2148675" y="2127430"/>
+                  </a:lnTo>
+                  <a:lnTo>
+                    <a:pt x="2220298" y="2182517"/>
+                  </a:lnTo>
+                  <a:lnTo>
+                    <a:pt x="2291920" y="2235366"/>
+                  </a:lnTo>
+                  <a:lnTo>
+                    <a:pt x="2363543" y="2286069"/>
+                  </a:lnTo>
+                  <a:lnTo>
+                    <a:pt x="2435165" y="2334712"/>
+                  </a:lnTo>
+                  <a:lnTo>
+                    <a:pt x="2506788" y="2381380"/>
+                  </a:lnTo>
+                  <a:lnTo>
+                    <a:pt x="2578410" y="2426152"/>
+                  </a:lnTo>
+                  <a:lnTo>
+                    <a:pt x="2650033" y="2469106"/>
+                  </a:lnTo>
+                  <a:lnTo>
+                    <a:pt x="2721655" y="2510316"/>
+                  </a:lnTo>
+                  <a:lnTo>
+                    <a:pt x="2793278" y="2549851"/>
+                  </a:lnTo>
+                  <a:lnTo>
+                    <a:pt x="2864901" y="2587781"/>
+                  </a:lnTo>
+                  <a:lnTo>
+                    <a:pt x="2936523" y="2624171"/>
+                  </a:lnTo>
+                  <a:lnTo>
+                    <a:pt x="3008146" y="2646325"/>
+                  </a:lnTo>
+                  <a:lnTo>
+                    <a:pt x="3079768" y="2587202"/>
+                  </a:lnTo>
+                  <a:lnTo>
+                    <a:pt x="3151391" y="2523904"/>
+                  </a:lnTo>
+                  <a:lnTo>
+                    <a:pt x="3223013" y="2456137"/>
+                  </a:lnTo>
+                  <a:lnTo>
+                    <a:pt x="3294636" y="2383586"/>
+                  </a:lnTo>
+                  <a:lnTo>
+                    <a:pt x="3366258" y="2305913"/>
+                  </a:lnTo>
+                  <a:lnTo>
+                    <a:pt x="3437881" y="2222756"/>
+                  </a:lnTo>
+                  <a:lnTo>
+                    <a:pt x="3509503" y="2133728"/>
+                  </a:lnTo>
+                  <a:lnTo>
+                    <a:pt x="3581126" y="2038414"/>
+                  </a:lnTo>
+                  <a:lnTo>
+                    <a:pt x="3652748" y="1936371"/>
+                  </a:lnTo>
+                  <a:lnTo>
+                    <a:pt x="3724371" y="1827123"/>
+                  </a:lnTo>
+                  <a:lnTo>
+                    <a:pt x="3795993" y="1710163"/>
+                  </a:lnTo>
+                  <a:lnTo>
+                    <a:pt x="3867616" y="1584945"/>
+                  </a:lnTo>
+                  <a:lnTo>
+                    <a:pt x="3939238" y="1450886"/>
+                  </a:lnTo>
+                  <a:lnTo>
+                    <a:pt x="4010861" y="1307362"/>
+                  </a:lnTo>
+                  <a:lnTo>
+                    <a:pt x="4082483" y="1153705"/>
+                  </a:lnTo>
+                  <a:lnTo>
+                    <a:pt x="4154106" y="989200"/>
+                  </a:lnTo>
+                  <a:lnTo>
+                    <a:pt x="4225729" y="813081"/>
+                  </a:lnTo>
+                  <a:lnTo>
+                    <a:pt x="4297351" y="624527"/>
+                  </a:lnTo>
+                  <a:lnTo>
+                    <a:pt x="4368974" y="422661"/>
+                  </a:lnTo>
+                  <a:lnTo>
+                    <a:pt x="4440596" y="206542"/>
+                  </a:lnTo>
+                  <a:lnTo>
+                    <a:pt x="4504531" y="0"/>
                   </a:lnTo>
                   <a:lnTo>
                     <a:pt x="7090630" y="0"/>
                   </a:lnTo>
                   <a:lnTo>
-                    <a:pt x="7090630" y="3406331"/>
-                  </a:lnTo>
-                  <a:lnTo>
-                    <a:pt x="7019007" y="3403055"/>
-                  </a:lnTo>
-                  <a:lnTo>
-                    <a:pt x="6947385" y="3399640"/>
-                  </a:lnTo>
-                  <a:lnTo>
-                    <a:pt x="6875762" y="3396080"/>
-                  </a:lnTo>
-                  <a:lnTo>
-                    <a:pt x="6804139" y="3392370"/>
-                  </a:lnTo>
-                  <a:lnTo>
-                    <a:pt x="6732517" y="3388502"/>
-                  </a:lnTo>
-                  <a:lnTo>
-                    <a:pt x="6660894" y="3384472"/>
-                  </a:lnTo>
-                  <a:lnTo>
-                    <a:pt x="6589272" y="3380270"/>
-                  </a:lnTo>
-                  <a:lnTo>
-                    <a:pt x="6517649" y="3375891"/>
-                  </a:lnTo>
-                  <a:lnTo>
-                    <a:pt x="6446027" y="3371326"/>
-                  </a:lnTo>
-                  <a:lnTo>
-                    <a:pt x="6374404" y="3366568"/>
-                  </a:lnTo>
-                  <a:lnTo>
-                    <a:pt x="6302782" y="3361608"/>
-                  </a:lnTo>
-                  <a:lnTo>
-                    <a:pt x="6231159" y="3356439"/>
-                  </a:lnTo>
-                  <a:lnTo>
-                    <a:pt x="6159537" y="3351051"/>
-                  </a:lnTo>
-                  <a:lnTo>
-                    <a:pt x="6087914" y="3345435"/>
-                  </a:lnTo>
-                  <a:lnTo>
-                    <a:pt x="6016292" y="3339582"/>
-                  </a:lnTo>
-                  <a:lnTo>
-                    <a:pt x="5944669" y="3333480"/>
-                  </a:lnTo>
-                  <a:lnTo>
-                    <a:pt x="5873047" y="3327120"/>
-                  </a:lnTo>
-                  <a:lnTo>
-                    <a:pt x="5801424" y="3320492"/>
-                  </a:lnTo>
-                  <a:lnTo>
-                    <a:pt x="5729802" y="3313582"/>
-                  </a:lnTo>
-                  <a:lnTo>
-                    <a:pt x="5658179" y="3306380"/>
-                  </a:lnTo>
-                  <a:lnTo>
-                    <a:pt x="5586557" y="3298874"/>
-                  </a:lnTo>
-                  <a:lnTo>
-                    <a:pt x="5514934" y="3291049"/>
-                  </a:lnTo>
-                  <a:lnTo>
-                    <a:pt x="5443311" y="3282894"/>
-                  </a:lnTo>
-                  <a:lnTo>
-                    <a:pt x="5371689" y="3274393"/>
-                  </a:lnTo>
-                  <a:lnTo>
-                    <a:pt x="5300066" y="3265533"/>
-                  </a:lnTo>
-                  <a:lnTo>
-                    <a:pt x="5228444" y="3256297"/>
-                  </a:lnTo>
-                  <a:lnTo>
-                    <a:pt x="5156821" y="3246671"/>
-                  </a:lnTo>
-                  <a:lnTo>
-                    <a:pt x="5085199" y="3236637"/>
-                  </a:lnTo>
-                  <a:lnTo>
-                    <a:pt x="5013576" y="3226179"/>
-                  </a:lnTo>
-                  <a:lnTo>
-                    <a:pt x="4941954" y="3215278"/>
-                  </a:lnTo>
-                  <a:lnTo>
-                    <a:pt x="4870331" y="3203916"/>
-                  </a:lnTo>
-                  <a:lnTo>
-                    <a:pt x="4798709" y="3192073"/>
-                  </a:lnTo>
-                  <a:lnTo>
-                    <a:pt x="4727086" y="3179728"/>
-                  </a:lnTo>
-                  <a:lnTo>
-                    <a:pt x="4655464" y="3166861"/>
-                  </a:lnTo>
-                  <a:lnTo>
-                    <a:pt x="4583841" y="3153450"/>
-                  </a:lnTo>
-                  <a:lnTo>
-                    <a:pt x="4512219" y="3139471"/>
-                  </a:lnTo>
-                  <a:lnTo>
-                    <a:pt x="4440596" y="3124900"/>
-                  </a:lnTo>
-                  <a:lnTo>
-                    <a:pt x="4368974" y="3109713"/>
-                  </a:lnTo>
-                  <a:lnTo>
-                    <a:pt x="4297351" y="3093883"/>
-                  </a:lnTo>
-                  <a:lnTo>
-                    <a:pt x="4225729" y="3077382"/>
-                  </a:lnTo>
-                  <a:lnTo>
-                    <a:pt x="4154106" y="3060184"/>
-                  </a:lnTo>
-                  <a:lnTo>
-                    <a:pt x="4082483" y="3042258"/>
-                  </a:lnTo>
-                  <a:lnTo>
-                    <a:pt x="4010861" y="3023573"/>
-                  </a:lnTo>
-                  <a:lnTo>
-                    <a:pt x="3939238" y="3004097"/>
-                  </a:lnTo>
-                  <a:lnTo>
-                    <a:pt x="3867616" y="2983797"/>
-                  </a:lnTo>
-                  <a:lnTo>
-                    <a:pt x="3795993" y="2962637"/>
-                  </a:lnTo>
-                  <a:lnTo>
-                    <a:pt x="3724371" y="2940583"/>
-                  </a:lnTo>
-                  <a:lnTo>
-                    <a:pt x="3652748" y="2917594"/>
-                  </a:lnTo>
-                  <a:lnTo>
-                    <a:pt x="3581126" y="2893633"/>
-                  </a:lnTo>
-                  <a:lnTo>
-                    <a:pt x="3509503" y="2868658"/>
-                  </a:lnTo>
-                  <a:lnTo>
-                    <a:pt x="3437881" y="2842626"/>
-                  </a:lnTo>
-                  <a:lnTo>
-                    <a:pt x="3366258" y="2815492"/>
-                  </a:lnTo>
-                  <a:lnTo>
-                    <a:pt x="3294636" y="2787209"/>
-                  </a:lnTo>
-                  <a:lnTo>
-                    <a:pt x="3223013" y="2757730"/>
-                  </a:lnTo>
-                  <a:lnTo>
-                    <a:pt x="3151391" y="2727003"/>
-                  </a:lnTo>
-                  <a:lnTo>
-                    <a:pt x="3079768" y="2694976"/>
-                  </a:lnTo>
-                  <a:lnTo>
-                    <a:pt x="3008146" y="2661593"/>
-                  </a:lnTo>
-                  <a:lnTo>
-                    <a:pt x="2936523" y="2697602"/>
-                  </a:lnTo>
-                  <a:lnTo>
-                    <a:pt x="2864901" y="2749432"/>
-                  </a:lnTo>
-                  <a:lnTo>
-                    <a:pt x="2793278" y="2797844"/>
-                  </a:lnTo>
-                  <a:lnTo>
-                    <a:pt x="2721655" y="2843065"/>
-                  </a:lnTo>
-                  <a:lnTo>
-                    <a:pt x="2650033" y="2885305"/>
-                  </a:lnTo>
-                  <a:lnTo>
-                    <a:pt x="2578410" y="2924760"/>
-                  </a:lnTo>
-                  <a:lnTo>
-                    <a:pt x="2506788" y="2961613"/>
-                  </a:lnTo>
-                  <a:lnTo>
-                    <a:pt x="2435165" y="2996037"/>
-                  </a:lnTo>
-                  <a:lnTo>
-                    <a:pt x="2363543" y="3028191"/>
-                  </a:lnTo>
-                  <a:lnTo>
-                    <a:pt x="2291920" y="3058225"/>
-                  </a:lnTo>
-                  <a:lnTo>
-                    <a:pt x="2220298" y="3086279"/>
-                  </a:lnTo>
-                  <a:lnTo>
-                    <a:pt x="2148675" y="3112484"/>
-                  </a:lnTo>
-                  <a:lnTo>
-                    <a:pt x="2077053" y="3136961"/>
-                  </a:lnTo>
-                  <a:lnTo>
-                    <a:pt x="2005430" y="3159824"/>
-                  </a:lnTo>
-                  <a:lnTo>
-                    <a:pt x="1933808" y="3181180"/>
-                  </a:lnTo>
-                  <a:lnTo>
-                    <a:pt x="1862185" y="3201128"/>
-                  </a:lnTo>
-                  <a:lnTo>
-                    <a:pt x="1790563" y="3219761"/>
-                  </a:lnTo>
-                  <a:lnTo>
-                    <a:pt x="1718940" y="3237165"/>
-                  </a:lnTo>
-                  <a:lnTo>
-                    <a:pt x="1647318" y="3253422"/>
-                  </a:lnTo>
-                  <a:lnTo>
-                    <a:pt x="1575695" y="3268607"/>
-                  </a:lnTo>
-                  <a:lnTo>
-                    <a:pt x="1504073" y="3282791"/>
-                  </a:lnTo>
-                  <a:lnTo>
-                    <a:pt x="1432450" y="3296040"/>
-                  </a:lnTo>
-                  <a:lnTo>
-                    <a:pt x="1360827" y="3308415"/>
-                  </a:lnTo>
-                  <a:lnTo>
-                    <a:pt x="1289205" y="3319975"/>
-                  </a:lnTo>
-                  <a:lnTo>
-                    <a:pt x="1217582" y="3330772"/>
-                  </a:lnTo>
-                  <a:lnTo>
-                    <a:pt x="1145960" y="3340857"/>
-                  </a:lnTo>
-                  <a:lnTo>
-                    <a:pt x="1074337" y="3350278"/>
-                  </a:lnTo>
-                  <a:lnTo>
-                    <a:pt x="1002715" y="3359077"/>
-                  </a:lnTo>
-                  <a:lnTo>
-                    <a:pt x="931092" y="3367297"/>
-                  </a:lnTo>
-                  <a:lnTo>
-                    <a:pt x="859470" y="3374974"/>
-                  </a:lnTo>
-                  <a:lnTo>
-                    <a:pt x="787847" y="3382145"/>
-                  </a:lnTo>
-                  <a:lnTo>
-                    <a:pt x="716225" y="3388844"/>
-                  </a:lnTo>
-                  <a:lnTo>
-                    <a:pt x="644602" y="3395101"/>
-                  </a:lnTo>
-                  <a:lnTo>
-                    <a:pt x="572980" y="3400945"/>
-                  </a:lnTo>
-                  <a:lnTo>
-                    <a:pt x="501357" y="3406404"/>
-                  </a:lnTo>
-                  <a:lnTo>
-                    <a:pt x="429735" y="3411503"/>
-                  </a:lnTo>
-                  <a:lnTo>
-                    <a:pt x="358112" y="3416266"/>
-                  </a:lnTo>
-                  <a:lnTo>
-                    <a:pt x="286490" y="3420715"/>
-                  </a:lnTo>
-                  <a:lnTo>
-                    <a:pt x="214867" y="3424871"/>
-                  </a:lnTo>
-                  <a:lnTo>
-                    <a:pt x="143245" y="3428752"/>
-                  </a:lnTo>
-                  <a:lnTo>
-                    <a:pt x="71622" y="3432378"/>
-                  </a:lnTo>
-                  <a:lnTo>
-                    <a:pt x="0" y="3435765"/>
+                    <a:pt x="7090630" y="3406143"/>
+                  </a:lnTo>
+                  <a:lnTo>
+                    <a:pt x="7019007" y="3402858"/>
+                  </a:lnTo>
+                  <a:lnTo>
+                    <a:pt x="6947385" y="3399434"/>
+                  </a:lnTo>
+                  <a:lnTo>
+                    <a:pt x="6875762" y="3395864"/>
+                  </a:lnTo>
+                  <a:lnTo>
+                    <a:pt x="6804139" y="3392144"/>
+                  </a:lnTo>
+                  <a:lnTo>
+                    <a:pt x="6732517" y="3388266"/>
+                  </a:lnTo>
+                  <a:lnTo>
+                    <a:pt x="6660894" y="3384224"/>
+                  </a:lnTo>
+                  <a:lnTo>
+                    <a:pt x="6589272" y="3380011"/>
+                  </a:lnTo>
+                  <a:lnTo>
+                    <a:pt x="6517649" y="3375619"/>
+                  </a:lnTo>
+                  <a:lnTo>
+                    <a:pt x="6446027" y="3371042"/>
+                  </a:lnTo>
+                  <a:lnTo>
+                    <a:pt x="6374404" y="3366270"/>
+                  </a:lnTo>
+                  <a:lnTo>
+                    <a:pt x="6302782" y="3361297"/>
+                  </a:lnTo>
+                  <a:lnTo>
+                    <a:pt x="6231159" y="3356113"/>
+                  </a:lnTo>
+                  <a:lnTo>
+                    <a:pt x="6159537" y="3350710"/>
+                  </a:lnTo>
+                  <a:lnTo>
+                    <a:pt x="6087914" y="3345078"/>
+                  </a:lnTo>
+                  <a:lnTo>
+                    <a:pt x="6016292" y="3339208"/>
+                  </a:lnTo>
+                  <a:lnTo>
+                    <a:pt x="5944669" y="3333089"/>
+                  </a:lnTo>
+                  <a:lnTo>
+                    <a:pt x="5873047" y="3326711"/>
+                  </a:lnTo>
+                  <a:lnTo>
+                    <a:pt x="5801424" y="3320063"/>
+                  </a:lnTo>
+                  <a:lnTo>
+                    <a:pt x="5729802" y="3313134"/>
+                  </a:lnTo>
+                  <a:lnTo>
+                    <a:pt x="5658179" y="3305911"/>
+                  </a:lnTo>
+                  <a:lnTo>
+                    <a:pt x="5586557" y="3298382"/>
+                  </a:lnTo>
+                  <a:lnTo>
+                    <a:pt x="5514934" y="3290535"/>
+                  </a:lnTo>
+                  <a:lnTo>
+                    <a:pt x="5443311" y="3282356"/>
+                  </a:lnTo>
+                  <a:lnTo>
+                    <a:pt x="5371689" y="3273830"/>
+                  </a:lnTo>
+                  <a:lnTo>
+                    <a:pt x="5300066" y="3264943"/>
+                  </a:lnTo>
+                  <a:lnTo>
+                    <a:pt x="5228444" y="3255680"/>
+                  </a:lnTo>
+                  <a:lnTo>
+                    <a:pt x="5156821" y="3246025"/>
+                  </a:lnTo>
+                  <a:lnTo>
+                    <a:pt x="5085199" y="3235962"/>
+                  </a:lnTo>
+                  <a:lnTo>
+                    <a:pt x="5013576" y="3225472"/>
+                  </a:lnTo>
+                  <a:lnTo>
+                    <a:pt x="4941954" y="3214538"/>
+                  </a:lnTo>
+                  <a:lnTo>
+                    <a:pt x="4870331" y="3203141"/>
+                  </a:lnTo>
+                  <a:lnTo>
+                    <a:pt x="4798709" y="3191262"/>
+                  </a:lnTo>
+                  <a:lnTo>
+                    <a:pt x="4727086" y="3178880"/>
+                  </a:lnTo>
+                  <a:lnTo>
+                    <a:pt x="4655464" y="3165974"/>
+                  </a:lnTo>
+                  <a:lnTo>
+                    <a:pt x="4583841" y="3152521"/>
+                  </a:lnTo>
+                  <a:lnTo>
+                    <a:pt x="4512219" y="3138499"/>
+                  </a:lnTo>
+                  <a:lnTo>
+                    <a:pt x="4440596" y="3123883"/>
+                  </a:lnTo>
+                  <a:lnTo>
+                    <a:pt x="4368974" y="3108649"/>
+                  </a:lnTo>
+                  <a:lnTo>
+                    <a:pt x="4297351" y="3092769"/>
+                  </a:lnTo>
+                  <a:lnTo>
+                    <a:pt x="4225729" y="3076218"/>
+                  </a:lnTo>
+                  <a:lnTo>
+                    <a:pt x="4154106" y="3058965"/>
+                  </a:lnTo>
+                  <a:lnTo>
+                    <a:pt x="4082483" y="3040982"/>
+                  </a:lnTo>
+                  <a:lnTo>
+                    <a:pt x="4010861" y="3022238"/>
+                  </a:lnTo>
+                  <a:lnTo>
+                    <a:pt x="3939238" y="3002701"/>
+                  </a:lnTo>
+                  <a:lnTo>
+                    <a:pt x="3867616" y="2982336"/>
+                  </a:lnTo>
+                  <a:lnTo>
+                    <a:pt x="3795993" y="2961109"/>
+                  </a:lnTo>
+                  <a:lnTo>
+                    <a:pt x="3724371" y="2938984"/>
+                  </a:lnTo>
+                  <a:lnTo>
+                    <a:pt x="3652748" y="2915922"/>
+                  </a:lnTo>
+                  <a:lnTo>
+                    <a:pt x="3581126" y="2891883"/>
+                  </a:lnTo>
+                  <a:lnTo>
+                    <a:pt x="3509503" y="2866827"/>
+                  </a:lnTo>
+                  <a:lnTo>
+                    <a:pt x="3437881" y="2840711"/>
+                  </a:lnTo>
+                  <a:lnTo>
+                    <a:pt x="3366258" y="2813488"/>
+                  </a:lnTo>
+                  <a:lnTo>
+                    <a:pt x="3294636" y="2785113"/>
+                  </a:lnTo>
+                  <a:lnTo>
+                    <a:pt x="3223013" y="2755537"/>
+                  </a:lnTo>
+                  <a:lnTo>
+                    <a:pt x="3151391" y="2724709"/>
+                  </a:lnTo>
+                  <a:lnTo>
+                    <a:pt x="3079768" y="2692576"/>
+                  </a:lnTo>
+                  <a:lnTo>
+                    <a:pt x="3008146" y="2659082"/>
+                  </a:lnTo>
+                  <a:lnTo>
+                    <a:pt x="2936523" y="2701550"/>
+                  </a:lnTo>
+                  <a:lnTo>
+                    <a:pt x="2864901" y="2753132"/>
+                  </a:lnTo>
+                  <a:lnTo>
+                    <a:pt x="2793278" y="2801313"/>
+                  </a:lnTo>
+                  <a:lnTo>
+                    <a:pt x="2721655" y="2846317"/>
+                  </a:lnTo>
+                  <a:lnTo>
+                    <a:pt x="2650033" y="2888353"/>
+                  </a:lnTo>
+                  <a:lnTo>
+                    <a:pt x="2578410" y="2927617"/>
+                  </a:lnTo>
+                  <a:lnTo>
+                    <a:pt x="2506788" y="2964291"/>
+                  </a:lnTo>
+                  <a:lnTo>
+                    <a:pt x="2435165" y="2998547"/>
+                  </a:lnTo>
+                  <a:lnTo>
+                    <a:pt x="2363543" y="3030544"/>
+                  </a:lnTo>
+                  <a:lnTo>
+                    <a:pt x="2291920" y="3060431"/>
+                  </a:lnTo>
+                  <a:lnTo>
+                    <a:pt x="2220298" y="3088347"/>
+                  </a:lnTo>
+                  <a:lnTo>
+                    <a:pt x="2148675" y="3114422"/>
+                  </a:lnTo>
+                  <a:lnTo>
+                    <a:pt x="2077053" y="3138777"/>
+                  </a:lnTo>
+                  <a:lnTo>
+                    <a:pt x="2005430" y="3161527"/>
+                  </a:lnTo>
+                  <a:lnTo>
+                    <a:pt x="1933808" y="3182776"/>
+                  </a:lnTo>
+                  <a:lnTo>
+                    <a:pt x="1862185" y="3202623"/>
+                  </a:lnTo>
+                  <a:lnTo>
+                    <a:pt x="1790563" y="3221162"/>
+                  </a:lnTo>
+                  <a:lnTo>
+                    <a:pt x="1718940" y="3238479"/>
+                  </a:lnTo>
+                  <a:lnTo>
+                    <a:pt x="1647318" y="3254653"/>
+                  </a:lnTo>
+                  <a:lnTo>
+                    <a:pt x="1575695" y="3269761"/>
+                  </a:lnTo>
+                  <a:lnTo>
+                    <a:pt x="1504073" y="3283872"/>
+                  </a:lnTo>
+                  <a:lnTo>
+                    <a:pt x="1432450" y="3297053"/>
+                  </a:lnTo>
+                  <a:lnTo>
+                    <a:pt x="1360827" y="3309365"/>
+                  </a:lnTo>
+                  <a:lnTo>
+                    <a:pt x="1289205" y="3320865"/>
+                  </a:lnTo>
+                  <a:lnTo>
+                    <a:pt x="1217582" y="3331606"/>
+                  </a:lnTo>
+                  <a:lnTo>
+                    <a:pt x="1145960" y="3341639"/>
+                  </a:lnTo>
+                  <a:lnTo>
+                    <a:pt x="1074337" y="3351010"/>
+                  </a:lnTo>
+                  <a:lnTo>
+                    <a:pt x="1002715" y="3359764"/>
+                  </a:lnTo>
+                  <a:lnTo>
+                    <a:pt x="931092" y="3367940"/>
+                  </a:lnTo>
+                  <a:lnTo>
+                    <a:pt x="859470" y="3375577"/>
+                  </a:lnTo>
+                  <a:lnTo>
+                    <a:pt x="787847" y="3382710"/>
+                  </a:lnTo>
+                  <a:lnTo>
+                    <a:pt x="716225" y="3389373"/>
+                  </a:lnTo>
+                  <a:lnTo>
+                    <a:pt x="644602" y="3395597"/>
+                  </a:lnTo>
+                  <a:lnTo>
+                    <a:pt x="572980" y="3401410"/>
+                  </a:lnTo>
+                  <a:lnTo>
+                    <a:pt x="501357" y="3406840"/>
+                  </a:lnTo>
+                  <a:lnTo>
+                    <a:pt x="429735" y="3411911"/>
+                  </a:lnTo>
+                  <a:lnTo>
+                    <a:pt x="358112" y="3416649"/>
+                  </a:lnTo>
+                  <a:lnTo>
+                    <a:pt x="286490" y="3421073"/>
+                  </a:lnTo>
+                  <a:lnTo>
+                    <a:pt x="214867" y="3425206"/>
+                  </a:lnTo>
+                  <a:lnTo>
+                    <a:pt x="143245" y="3429067"/>
+                  </a:lnTo>
+                  <a:lnTo>
+                    <a:pt x="71622" y="3432673"/>
+                  </a:lnTo>
+                  <a:lnTo>
+                    <a:pt x="0" y="3436041"/>
                   </a:lnTo>
                   <a:close/>
                 </a:path>
@@ -3894,183 +3894,183 @@
           </p:nvSpPr>
           <p:spPr>
             <a:xfrm>
-              <a:off x="1685487" y="2073503"/>
-              <a:ext cx="3986102" cy="2642114"/>
+              <a:off x="1691484" y="2073503"/>
+              <a:ext cx="3985096" cy="2646325"/>
             </a:xfrm>
             <a:custGeom>
               <a:avLst/>
               <a:pathLst>
-                <a:path w="3986102" h="2642114">
+                <a:path w="3985096" h="2646325">
                   <a:moveTo>
                     <a:pt x="0" y="0"/>
                   </a:moveTo>
                   <a:lnTo>
-                    <a:pt x="59542" y="118407"/>
-                  </a:lnTo>
-                  <a:lnTo>
-                    <a:pt x="131164" y="255054"/>
-                  </a:lnTo>
-                  <a:lnTo>
-                    <a:pt x="202787" y="386153"/>
-                  </a:lnTo>
-                  <a:lnTo>
-                    <a:pt x="274409" y="511929"/>
-                  </a:lnTo>
-                  <a:lnTo>
-                    <a:pt x="346032" y="632597"/>
-                  </a:lnTo>
-                  <a:lnTo>
-                    <a:pt x="417655" y="748366"/>
-                  </a:lnTo>
-                  <a:lnTo>
-                    <a:pt x="489277" y="859434"/>
-                  </a:lnTo>
-                  <a:lnTo>
-                    <a:pt x="560900" y="965993"/>
-                  </a:lnTo>
-                  <a:lnTo>
-                    <a:pt x="632522" y="1068224"/>
-                  </a:lnTo>
-                  <a:lnTo>
-                    <a:pt x="704145" y="1166305"/>
-                  </a:lnTo>
-                  <a:lnTo>
-                    <a:pt x="775767" y="1260403"/>
-                  </a:lnTo>
-                  <a:lnTo>
-                    <a:pt x="847390" y="1350680"/>
-                  </a:lnTo>
-                  <a:lnTo>
-                    <a:pt x="919012" y="1437292"/>
-                  </a:lnTo>
-                  <a:lnTo>
-                    <a:pt x="990635" y="1520387"/>
-                  </a:lnTo>
-                  <a:lnTo>
-                    <a:pt x="1062257" y="1600107"/>
-                  </a:lnTo>
-                  <a:lnTo>
-                    <a:pt x="1133880" y="1676591"/>
-                  </a:lnTo>
-                  <a:lnTo>
-                    <a:pt x="1205502" y="1749970"/>
-                  </a:lnTo>
-                  <a:lnTo>
-                    <a:pt x="1277125" y="1820368"/>
-                  </a:lnTo>
-                  <a:lnTo>
-                    <a:pt x="1348747" y="1887909"/>
-                  </a:lnTo>
-                  <a:lnTo>
-                    <a:pt x="1420370" y="1952706"/>
-                  </a:lnTo>
-                  <a:lnTo>
-                    <a:pt x="1491992" y="2014873"/>
-                  </a:lnTo>
-                  <a:lnTo>
-                    <a:pt x="1563615" y="2074516"/>
-                  </a:lnTo>
-                  <a:lnTo>
-                    <a:pt x="1635237" y="2131737"/>
-                  </a:lnTo>
-                  <a:lnTo>
-                    <a:pt x="1706860" y="2186634"/>
-                  </a:lnTo>
-                  <a:lnTo>
-                    <a:pt x="1778483" y="2239302"/>
-                  </a:lnTo>
-                  <a:lnTo>
-                    <a:pt x="1850105" y="2289832"/>
-                  </a:lnTo>
-                  <a:lnTo>
-                    <a:pt x="1921728" y="2338310"/>
-                  </a:lnTo>
-                  <a:lnTo>
-                    <a:pt x="1993350" y="2384820"/>
-                  </a:lnTo>
-                  <a:lnTo>
-                    <a:pt x="2064973" y="2429441"/>
-                  </a:lnTo>
-                  <a:lnTo>
-                    <a:pt x="2136595" y="2472250"/>
-                  </a:lnTo>
-                  <a:lnTo>
-                    <a:pt x="2208218" y="2513321"/>
-                  </a:lnTo>
-                  <a:lnTo>
-                    <a:pt x="2279840" y="2552725"/>
-                  </a:lnTo>
-                  <a:lnTo>
-                    <a:pt x="2351463" y="2590528"/>
-                  </a:lnTo>
-                  <a:lnTo>
-                    <a:pt x="2423085" y="2626797"/>
-                  </a:lnTo>
-                  <a:lnTo>
-                    <a:pt x="2494708" y="2642114"/>
-                  </a:lnTo>
-                  <a:lnTo>
-                    <a:pt x="2566330" y="2582710"/>
-                  </a:lnTo>
-                  <a:lnTo>
-                    <a:pt x="2637953" y="2519112"/>
-                  </a:lnTo>
-                  <a:lnTo>
-                    <a:pt x="2709575" y="2451026"/>
-                  </a:lnTo>
-                  <a:lnTo>
-                    <a:pt x="2781198" y="2378134"/>
-                  </a:lnTo>
-                  <a:lnTo>
-                    <a:pt x="2852820" y="2300097"/>
-                  </a:lnTo>
-                  <a:lnTo>
-                    <a:pt x="2924443" y="2216552"/>
-                  </a:lnTo>
-                  <a:lnTo>
-                    <a:pt x="2996065" y="2127110"/>
-                  </a:lnTo>
-                  <a:lnTo>
-                    <a:pt x="3067688" y="2031356"/>
-                  </a:lnTo>
-                  <a:lnTo>
-                    <a:pt x="3139311" y="1928842"/>
-                  </a:lnTo>
-                  <a:lnTo>
-                    <a:pt x="3210933" y="1819093"/>
-                  </a:lnTo>
-                  <a:lnTo>
-                    <a:pt x="3282556" y="1701598"/>
-                  </a:lnTo>
-                  <a:lnTo>
-                    <a:pt x="3354178" y="1575810"/>
-                  </a:lnTo>
-                  <a:lnTo>
-                    <a:pt x="3425801" y="1441143"/>
-                  </a:lnTo>
-                  <a:lnTo>
-                    <a:pt x="3497423" y="1296971"/>
-                  </a:lnTo>
-                  <a:lnTo>
-                    <a:pt x="3569046" y="1142623"/>
-                  </a:lnTo>
-                  <a:lnTo>
-                    <a:pt x="3640668" y="977380"/>
-                  </a:lnTo>
-                  <a:lnTo>
-                    <a:pt x="3712291" y="800475"/>
-                  </a:lnTo>
-                  <a:lnTo>
-                    <a:pt x="3783913" y="611083"/>
-                  </a:lnTo>
-                  <a:lnTo>
-                    <a:pt x="3855536" y="408323"/>
-                  </a:lnTo>
-                  <a:lnTo>
-                    <a:pt x="3927158" y="191252"/>
-                  </a:lnTo>
-                  <a:lnTo>
-                    <a:pt x="3986102" y="0"/>
+                    <a:pt x="53545" y="106874"/>
+                  </a:lnTo>
+                  <a:lnTo>
+                    <a:pt x="125167" y="244025"/>
+                  </a:lnTo>
+                  <a:lnTo>
+                    <a:pt x="196790" y="375606"/>
+                  </a:lnTo>
+                  <a:lnTo>
+                    <a:pt x="268412" y="501843"/>
+                  </a:lnTo>
+                  <a:lnTo>
+                    <a:pt x="340035" y="622952"/>
+                  </a:lnTo>
+                  <a:lnTo>
+                    <a:pt x="411657" y="739143"/>
+                  </a:lnTo>
+                  <a:lnTo>
+                    <a:pt x="483280" y="850614"/>
+                  </a:lnTo>
+                  <a:lnTo>
+                    <a:pt x="554902" y="957558"/>
+                  </a:lnTo>
+                  <a:lnTo>
+                    <a:pt x="626525" y="1060159"/>
+                  </a:lnTo>
+                  <a:lnTo>
+                    <a:pt x="698147" y="1158592"/>
+                  </a:lnTo>
+                  <a:lnTo>
+                    <a:pt x="769770" y="1253028"/>
+                  </a:lnTo>
+                  <a:lnTo>
+                    <a:pt x="841392" y="1343628"/>
+                  </a:lnTo>
+                  <a:lnTo>
+                    <a:pt x="913015" y="1430549"/>
+                  </a:lnTo>
+                  <a:lnTo>
+                    <a:pt x="984637" y="1513939"/>
+                  </a:lnTo>
+                  <a:lnTo>
+                    <a:pt x="1056260" y="1593942"/>
+                  </a:lnTo>
+                  <a:lnTo>
+                    <a:pt x="1127882" y="1670696"/>
+                  </a:lnTo>
+                  <a:lnTo>
+                    <a:pt x="1199505" y="1744333"/>
+                  </a:lnTo>
+                  <a:lnTo>
+                    <a:pt x="1271128" y="1814979"/>
+                  </a:lnTo>
+                  <a:lnTo>
+                    <a:pt x="1342750" y="1882755"/>
+                  </a:lnTo>
+                  <a:lnTo>
+                    <a:pt x="1414373" y="1947779"/>
+                  </a:lnTo>
+                  <a:lnTo>
+                    <a:pt x="1485995" y="2010162"/>
+                  </a:lnTo>
+                  <a:lnTo>
+                    <a:pt x="1557618" y="2070012"/>
+                  </a:lnTo>
+                  <a:lnTo>
+                    <a:pt x="1629240" y="2127430"/>
+                  </a:lnTo>
+                  <a:lnTo>
+                    <a:pt x="1700863" y="2182517"/>
+                  </a:lnTo>
+                  <a:lnTo>
+                    <a:pt x="1772485" y="2235366"/>
+                  </a:lnTo>
+                  <a:lnTo>
+                    <a:pt x="1844108" y="2286069"/>
+                  </a:lnTo>
+                  <a:lnTo>
+                    <a:pt x="1915730" y="2334712"/>
+                  </a:lnTo>
+                  <a:lnTo>
+                    <a:pt x="1987353" y="2381380"/>
+                  </a:lnTo>
+                  <a:lnTo>
+                    <a:pt x="2058975" y="2426152"/>
+                  </a:lnTo>
+                  <a:lnTo>
+                    <a:pt x="2130598" y="2469106"/>
+                  </a:lnTo>
+                  <a:lnTo>
+                    <a:pt x="2202220" y="2510316"/>
+                  </a:lnTo>
+                  <a:lnTo>
+                    <a:pt x="2273843" y="2549851"/>
+                  </a:lnTo>
+                  <a:lnTo>
+                    <a:pt x="2345465" y="2587781"/>
+                  </a:lnTo>
+                  <a:lnTo>
+                    <a:pt x="2417088" y="2624171"/>
+                  </a:lnTo>
+                  <a:lnTo>
+                    <a:pt x="2488710" y="2646325"/>
+                  </a:lnTo>
+                  <a:lnTo>
+                    <a:pt x="2560333" y="2587202"/>
+                  </a:lnTo>
+                  <a:lnTo>
+                    <a:pt x="2631956" y="2523904"/>
+                  </a:lnTo>
+                  <a:lnTo>
+                    <a:pt x="2703578" y="2456137"/>
+                  </a:lnTo>
+                  <a:lnTo>
+                    <a:pt x="2775201" y="2383586"/>
+                  </a:lnTo>
+                  <a:lnTo>
+                    <a:pt x="2846823" y="2305913"/>
+                  </a:lnTo>
+                  <a:lnTo>
+                    <a:pt x="2918446" y="2222756"/>
+                  </a:lnTo>
+                  <a:lnTo>
+                    <a:pt x="2990068" y="2133728"/>
+                  </a:lnTo>
+                  <a:lnTo>
+                    <a:pt x="3061691" y="2038414"/>
+                  </a:lnTo>
+                  <a:lnTo>
+                    <a:pt x="3133313" y="1936371"/>
+                  </a:lnTo>
+                  <a:lnTo>
+                    <a:pt x="3204936" y="1827123"/>
+                  </a:lnTo>
+                  <a:lnTo>
+                    <a:pt x="3276558" y="1710163"/>
+                  </a:lnTo>
+                  <a:lnTo>
+                    <a:pt x="3348181" y="1584945"/>
+                  </a:lnTo>
+                  <a:lnTo>
+                    <a:pt x="3419803" y="1450886"/>
+                  </a:lnTo>
+                  <a:lnTo>
+                    <a:pt x="3491426" y="1307362"/>
+                  </a:lnTo>
+                  <a:lnTo>
+                    <a:pt x="3563048" y="1153705"/>
+                  </a:lnTo>
+                  <a:lnTo>
+                    <a:pt x="3634671" y="989200"/>
+                  </a:lnTo>
+                  <a:lnTo>
+                    <a:pt x="3706293" y="813081"/>
+                  </a:lnTo>
+                  <a:lnTo>
+                    <a:pt x="3777916" y="624527"/>
+                  </a:lnTo>
+                  <a:lnTo>
+                    <a:pt x="3849538" y="422661"/>
+                  </a:lnTo>
+                  <a:lnTo>
+                    <a:pt x="3921161" y="206542"/>
+                  </a:lnTo>
+                  <a:lnTo>
+                    <a:pt x="3985096" y="0"/>
                   </a:lnTo>
                 </a:path>
               </a:pathLst>
@@ -4090,312 +4090,312 @@
           </p:nvSpPr>
           <p:spPr>
             <a:xfrm>
-              <a:off x="1172049" y="4735096"/>
-              <a:ext cx="7090630" cy="774172"/>
+              <a:off x="1172049" y="4732585"/>
+              <a:ext cx="7090630" cy="776958"/>
             </a:xfrm>
             <a:custGeom>
               <a:avLst/>
               <a:pathLst>
-                <a:path w="7090630" h="774172">
+                <a:path w="7090630" h="776958">
                   <a:moveTo>
-                    <a:pt x="7090630" y="744738"/>
+                    <a:pt x="7090630" y="747061"/>
                   </a:moveTo>
                   <a:lnTo>
-                    <a:pt x="7019007" y="741462"/>
-                  </a:lnTo>
-                  <a:lnTo>
-                    <a:pt x="6947385" y="738047"/>
-                  </a:lnTo>
-                  <a:lnTo>
-                    <a:pt x="6875762" y="734487"/>
-                  </a:lnTo>
-                  <a:lnTo>
-                    <a:pt x="6804139" y="730777"/>
-                  </a:lnTo>
-                  <a:lnTo>
-                    <a:pt x="6732517" y="726909"/>
-                  </a:lnTo>
-                  <a:lnTo>
-                    <a:pt x="6660894" y="722878"/>
-                  </a:lnTo>
-                  <a:lnTo>
-                    <a:pt x="6589272" y="718677"/>
-                  </a:lnTo>
-                  <a:lnTo>
-                    <a:pt x="6517649" y="714297"/>
-                  </a:lnTo>
-                  <a:lnTo>
-                    <a:pt x="6446027" y="709733"/>
-                  </a:lnTo>
-                  <a:lnTo>
-                    <a:pt x="6374404" y="704975"/>
-                  </a:lnTo>
-                  <a:lnTo>
-                    <a:pt x="6302782" y="700015"/>
-                  </a:lnTo>
-                  <a:lnTo>
-                    <a:pt x="6231159" y="694846"/>
-                  </a:lnTo>
-                  <a:lnTo>
-                    <a:pt x="6159537" y="689458"/>
-                  </a:lnTo>
-                  <a:lnTo>
-                    <a:pt x="6087914" y="683842"/>
-                  </a:lnTo>
-                  <a:lnTo>
-                    <a:pt x="6016292" y="677988"/>
-                  </a:lnTo>
-                  <a:lnTo>
-                    <a:pt x="5944669" y="671887"/>
-                  </a:lnTo>
-                  <a:lnTo>
-                    <a:pt x="5873047" y="665527"/>
-                  </a:lnTo>
-                  <a:lnTo>
-                    <a:pt x="5801424" y="658898"/>
-                  </a:lnTo>
-                  <a:lnTo>
-                    <a:pt x="5729802" y="651989"/>
-                  </a:lnTo>
-                  <a:lnTo>
-                    <a:pt x="5658179" y="644787"/>
-                  </a:lnTo>
-                  <a:lnTo>
-                    <a:pt x="5586557" y="637281"/>
-                  </a:lnTo>
-                  <a:lnTo>
-                    <a:pt x="5514934" y="629456"/>
-                  </a:lnTo>
-                  <a:lnTo>
-                    <a:pt x="5443311" y="621301"/>
-                  </a:lnTo>
-                  <a:lnTo>
-                    <a:pt x="5371689" y="612800"/>
-                  </a:lnTo>
-                  <a:lnTo>
-                    <a:pt x="5300066" y="603940"/>
-                  </a:lnTo>
-                  <a:lnTo>
-                    <a:pt x="5228444" y="594704"/>
-                  </a:lnTo>
-                  <a:lnTo>
-                    <a:pt x="5156821" y="585078"/>
-                  </a:lnTo>
-                  <a:lnTo>
-                    <a:pt x="5085199" y="575044"/>
-                  </a:lnTo>
-                  <a:lnTo>
-                    <a:pt x="5013576" y="564586"/>
-                  </a:lnTo>
-                  <a:lnTo>
-                    <a:pt x="4941954" y="553685"/>
-                  </a:lnTo>
-                  <a:lnTo>
-                    <a:pt x="4870331" y="542323"/>
-                  </a:lnTo>
-                  <a:lnTo>
-                    <a:pt x="4798709" y="530480"/>
-                  </a:lnTo>
-                  <a:lnTo>
-                    <a:pt x="4727086" y="518135"/>
-                  </a:lnTo>
-                  <a:lnTo>
-                    <a:pt x="4655464" y="505268"/>
-                  </a:lnTo>
-                  <a:lnTo>
-                    <a:pt x="4583841" y="491857"/>
-                  </a:lnTo>
-                  <a:lnTo>
-                    <a:pt x="4512219" y="477878"/>
-                  </a:lnTo>
-                  <a:lnTo>
-                    <a:pt x="4440596" y="463307"/>
-                  </a:lnTo>
-                  <a:lnTo>
-                    <a:pt x="4368974" y="448120"/>
-                  </a:lnTo>
-                  <a:lnTo>
-                    <a:pt x="4297351" y="432289"/>
-                  </a:lnTo>
-                  <a:lnTo>
-                    <a:pt x="4225729" y="415789"/>
-                  </a:lnTo>
-                  <a:lnTo>
-                    <a:pt x="4154106" y="398591"/>
-                  </a:lnTo>
-                  <a:lnTo>
-                    <a:pt x="4082483" y="380665"/>
-                  </a:lnTo>
-                  <a:lnTo>
-                    <a:pt x="4010861" y="361980"/>
-                  </a:lnTo>
-                  <a:lnTo>
-                    <a:pt x="3939238" y="342504"/>
-                  </a:lnTo>
-                  <a:lnTo>
-                    <a:pt x="3867616" y="322204"/>
-                  </a:lnTo>
-                  <a:lnTo>
-                    <a:pt x="3795993" y="301044"/>
-                  </a:lnTo>
-                  <a:lnTo>
-                    <a:pt x="3724371" y="278990"/>
-                  </a:lnTo>
-                  <a:lnTo>
-                    <a:pt x="3652748" y="256001"/>
-                  </a:lnTo>
-                  <a:lnTo>
-                    <a:pt x="3581126" y="232040"/>
-                  </a:lnTo>
-                  <a:lnTo>
-                    <a:pt x="3509503" y="207065"/>
-                  </a:lnTo>
-                  <a:lnTo>
-                    <a:pt x="3437881" y="181033"/>
-                  </a:lnTo>
-                  <a:lnTo>
-                    <a:pt x="3366258" y="153899"/>
-                  </a:lnTo>
-                  <a:lnTo>
-                    <a:pt x="3294636" y="125616"/>
-                  </a:lnTo>
-                  <a:lnTo>
-                    <a:pt x="3223013" y="96137"/>
-                  </a:lnTo>
-                  <a:lnTo>
-                    <a:pt x="3151391" y="65410"/>
-                  </a:lnTo>
-                  <a:lnTo>
-                    <a:pt x="3079768" y="33382"/>
+                    <a:pt x="7019007" y="743775"/>
+                  </a:lnTo>
+                  <a:lnTo>
+                    <a:pt x="6947385" y="740351"/>
+                  </a:lnTo>
+                  <a:lnTo>
+                    <a:pt x="6875762" y="736782"/>
+                  </a:lnTo>
+                  <a:lnTo>
+                    <a:pt x="6804139" y="733061"/>
+                  </a:lnTo>
+                  <a:lnTo>
+                    <a:pt x="6732517" y="729183"/>
+                  </a:lnTo>
+                  <a:lnTo>
+                    <a:pt x="6660894" y="725141"/>
+                  </a:lnTo>
+                  <a:lnTo>
+                    <a:pt x="6589272" y="720928"/>
+                  </a:lnTo>
+                  <a:lnTo>
+                    <a:pt x="6517649" y="716536"/>
+                  </a:lnTo>
+                  <a:lnTo>
+                    <a:pt x="6446027" y="711959"/>
+                  </a:lnTo>
+                  <a:lnTo>
+                    <a:pt x="6374404" y="707188"/>
+                  </a:lnTo>
+                  <a:lnTo>
+                    <a:pt x="6302782" y="702214"/>
+                  </a:lnTo>
+                  <a:lnTo>
+                    <a:pt x="6231159" y="697031"/>
+                  </a:lnTo>
+                  <a:lnTo>
+                    <a:pt x="6159537" y="691627"/>
+                  </a:lnTo>
+                  <a:lnTo>
+                    <a:pt x="6087914" y="685995"/>
+                  </a:lnTo>
+                  <a:lnTo>
+                    <a:pt x="6016292" y="680125"/>
+                  </a:lnTo>
+                  <a:lnTo>
+                    <a:pt x="5944669" y="674006"/>
+                  </a:lnTo>
+                  <a:lnTo>
+                    <a:pt x="5873047" y="667628"/>
+                  </a:lnTo>
+                  <a:lnTo>
+                    <a:pt x="5801424" y="660980"/>
+                  </a:lnTo>
+                  <a:lnTo>
+                    <a:pt x="5729802" y="654051"/>
+                  </a:lnTo>
+                  <a:lnTo>
+                    <a:pt x="5658179" y="646828"/>
+                  </a:lnTo>
+                  <a:lnTo>
+                    <a:pt x="5586557" y="639300"/>
+                  </a:lnTo>
+                  <a:lnTo>
+                    <a:pt x="5514934" y="631452"/>
+                  </a:lnTo>
+                  <a:lnTo>
+                    <a:pt x="5443311" y="623273"/>
+                  </a:lnTo>
+                  <a:lnTo>
+                    <a:pt x="5371689" y="614747"/>
+                  </a:lnTo>
+                  <a:lnTo>
+                    <a:pt x="5300066" y="605860"/>
+                  </a:lnTo>
+                  <a:lnTo>
+                    <a:pt x="5228444" y="596598"/>
+                  </a:lnTo>
+                  <a:lnTo>
+                    <a:pt x="5156821" y="586943"/>
+                  </a:lnTo>
+                  <a:lnTo>
+                    <a:pt x="5085199" y="576879"/>
+                  </a:lnTo>
+                  <a:lnTo>
+                    <a:pt x="5013576" y="566389"/>
+                  </a:lnTo>
+                  <a:lnTo>
+                    <a:pt x="4941954" y="555455"/>
+                  </a:lnTo>
+                  <a:lnTo>
+                    <a:pt x="4870331" y="544059"/>
+                  </a:lnTo>
+                  <a:lnTo>
+                    <a:pt x="4798709" y="532179"/>
+                  </a:lnTo>
+                  <a:lnTo>
+                    <a:pt x="4727086" y="519797"/>
+                  </a:lnTo>
+                  <a:lnTo>
+                    <a:pt x="4655464" y="506891"/>
+                  </a:lnTo>
+                  <a:lnTo>
+                    <a:pt x="4583841" y="493438"/>
+                  </a:lnTo>
+                  <a:lnTo>
+                    <a:pt x="4512219" y="479416"/>
+                  </a:lnTo>
+                  <a:lnTo>
+                    <a:pt x="4440596" y="464800"/>
+                  </a:lnTo>
+                  <a:lnTo>
+                    <a:pt x="4368974" y="449566"/>
+                  </a:lnTo>
+                  <a:lnTo>
+                    <a:pt x="4297351" y="433686"/>
+                  </a:lnTo>
+                  <a:lnTo>
+                    <a:pt x="4225729" y="417135"/>
+                  </a:lnTo>
+                  <a:lnTo>
+                    <a:pt x="4154106" y="399882"/>
+                  </a:lnTo>
+                  <a:lnTo>
+                    <a:pt x="4082483" y="381900"/>
+                  </a:lnTo>
+                  <a:lnTo>
+                    <a:pt x="4010861" y="363156"/>
+                  </a:lnTo>
+                  <a:lnTo>
+                    <a:pt x="3939238" y="343618"/>
+                  </a:lnTo>
+                  <a:lnTo>
+                    <a:pt x="3867616" y="323253"/>
+                  </a:lnTo>
+                  <a:lnTo>
+                    <a:pt x="3795993" y="302026"/>
+                  </a:lnTo>
+                  <a:lnTo>
+                    <a:pt x="3724371" y="279901"/>
+                  </a:lnTo>
+                  <a:lnTo>
+                    <a:pt x="3652748" y="256839"/>
+                  </a:lnTo>
+                  <a:lnTo>
+                    <a:pt x="3581126" y="232801"/>
+                  </a:lnTo>
+                  <a:lnTo>
+                    <a:pt x="3509503" y="207745"/>
+                  </a:lnTo>
+                  <a:lnTo>
+                    <a:pt x="3437881" y="181628"/>
+                  </a:lnTo>
+                  <a:lnTo>
+                    <a:pt x="3366258" y="154405"/>
+                  </a:lnTo>
+                  <a:lnTo>
+                    <a:pt x="3294636" y="126031"/>
+                  </a:lnTo>
+                  <a:lnTo>
+                    <a:pt x="3223013" y="96454"/>
+                  </a:lnTo>
+                  <a:lnTo>
+                    <a:pt x="3151391" y="65626"/>
+                  </a:lnTo>
+                  <a:lnTo>
+                    <a:pt x="3079768" y="33493"/>
                   </a:lnTo>
                   <a:lnTo>
                     <a:pt x="3008146" y="0"/>
                   </a:lnTo>
                   <a:lnTo>
-                    <a:pt x="2936523" y="36009"/>
-                  </a:lnTo>
-                  <a:lnTo>
-                    <a:pt x="2864901" y="87839"/>
-                  </a:lnTo>
-                  <a:lnTo>
-                    <a:pt x="2793278" y="136251"/>
-                  </a:lnTo>
-                  <a:lnTo>
-                    <a:pt x="2721655" y="181472"/>
-                  </a:lnTo>
-                  <a:lnTo>
-                    <a:pt x="2650033" y="223712"/>
-                  </a:lnTo>
-                  <a:lnTo>
-                    <a:pt x="2578410" y="263166"/>
-                  </a:lnTo>
-                  <a:lnTo>
-                    <a:pt x="2506788" y="300020"/>
-                  </a:lnTo>
-                  <a:lnTo>
-                    <a:pt x="2435165" y="334444"/>
-                  </a:lnTo>
-                  <a:lnTo>
-                    <a:pt x="2363543" y="366598"/>
-                  </a:lnTo>
-                  <a:lnTo>
-                    <a:pt x="2291920" y="396632"/>
-                  </a:lnTo>
-                  <a:lnTo>
-                    <a:pt x="2220298" y="424686"/>
-                  </a:lnTo>
-                  <a:lnTo>
-                    <a:pt x="2148675" y="450891"/>
-                  </a:lnTo>
-                  <a:lnTo>
-                    <a:pt x="2077053" y="475368"/>
-                  </a:lnTo>
-                  <a:lnTo>
-                    <a:pt x="2005430" y="498231"/>
-                  </a:lnTo>
-                  <a:lnTo>
-                    <a:pt x="1933808" y="519587"/>
-                  </a:lnTo>
-                  <a:lnTo>
-                    <a:pt x="1862185" y="539535"/>
-                  </a:lnTo>
-                  <a:lnTo>
-                    <a:pt x="1790563" y="558168"/>
-                  </a:lnTo>
-                  <a:lnTo>
-                    <a:pt x="1718940" y="575572"/>
-                  </a:lnTo>
-                  <a:lnTo>
-                    <a:pt x="1647318" y="591829"/>
-                  </a:lnTo>
-                  <a:lnTo>
-                    <a:pt x="1575695" y="607014"/>
-                  </a:lnTo>
-                  <a:lnTo>
-                    <a:pt x="1504073" y="621198"/>
-                  </a:lnTo>
-                  <a:lnTo>
-                    <a:pt x="1432450" y="634447"/>
-                  </a:lnTo>
-                  <a:lnTo>
-                    <a:pt x="1360827" y="646822"/>
-                  </a:lnTo>
-                  <a:lnTo>
-                    <a:pt x="1289205" y="658381"/>
-                  </a:lnTo>
-                  <a:lnTo>
-                    <a:pt x="1217582" y="669179"/>
-                  </a:lnTo>
-                  <a:lnTo>
-                    <a:pt x="1145960" y="679264"/>
-                  </a:lnTo>
-                  <a:lnTo>
-                    <a:pt x="1074337" y="688685"/>
-                  </a:lnTo>
-                  <a:lnTo>
-                    <a:pt x="1002715" y="697484"/>
-                  </a:lnTo>
-                  <a:lnTo>
-                    <a:pt x="931092" y="705704"/>
-                  </a:lnTo>
-                  <a:lnTo>
-                    <a:pt x="859470" y="713381"/>
-                  </a:lnTo>
-                  <a:lnTo>
-                    <a:pt x="787847" y="720552"/>
-                  </a:lnTo>
-                  <a:lnTo>
-                    <a:pt x="716225" y="727251"/>
-                  </a:lnTo>
-                  <a:lnTo>
-                    <a:pt x="644602" y="733508"/>
-                  </a:lnTo>
-                  <a:lnTo>
-                    <a:pt x="572980" y="739352"/>
-                  </a:lnTo>
-                  <a:lnTo>
-                    <a:pt x="501357" y="744811"/>
-                  </a:lnTo>
-                  <a:lnTo>
-                    <a:pt x="429735" y="749910"/>
-                  </a:lnTo>
-                  <a:lnTo>
-                    <a:pt x="358112" y="754673"/>
-                  </a:lnTo>
-                  <a:lnTo>
-                    <a:pt x="286490" y="759122"/>
-                  </a:lnTo>
-                  <a:lnTo>
-                    <a:pt x="214867" y="763277"/>
-                  </a:lnTo>
-                  <a:lnTo>
-                    <a:pt x="143245" y="767159"/>
-                  </a:lnTo>
-                  <a:lnTo>
-                    <a:pt x="71622" y="770785"/>
-                  </a:lnTo>
-                  <a:lnTo>
-                    <a:pt x="0" y="774172"/>
+                    <a:pt x="2936523" y="42467"/>
+                  </a:lnTo>
+                  <a:lnTo>
+                    <a:pt x="2864901" y="94050"/>
+                  </a:lnTo>
+                  <a:lnTo>
+                    <a:pt x="2793278" y="142231"/>
+                  </a:lnTo>
+                  <a:lnTo>
+                    <a:pt x="2721655" y="187234"/>
+                  </a:lnTo>
+                  <a:lnTo>
+                    <a:pt x="2650033" y="229270"/>
+                  </a:lnTo>
+                  <a:lnTo>
+                    <a:pt x="2578410" y="268534"/>
+                  </a:lnTo>
+                  <a:lnTo>
+                    <a:pt x="2506788" y="305208"/>
+                  </a:lnTo>
+                  <a:lnTo>
+                    <a:pt x="2435165" y="339464"/>
+                  </a:lnTo>
+                  <a:lnTo>
+                    <a:pt x="2363543" y="371461"/>
+                  </a:lnTo>
+                  <a:lnTo>
+                    <a:pt x="2291920" y="401348"/>
+                  </a:lnTo>
+                  <a:lnTo>
+                    <a:pt x="2220298" y="429264"/>
+                  </a:lnTo>
+                  <a:lnTo>
+                    <a:pt x="2148675" y="455339"/>
+                  </a:lnTo>
+                  <a:lnTo>
+                    <a:pt x="2077053" y="479695"/>
+                  </a:lnTo>
+                  <a:lnTo>
+                    <a:pt x="2005430" y="502444"/>
+                  </a:lnTo>
+                  <a:lnTo>
+                    <a:pt x="1933808" y="523693"/>
+                  </a:lnTo>
+                  <a:lnTo>
+                    <a:pt x="1862185" y="543541"/>
+                  </a:lnTo>
+                  <a:lnTo>
+                    <a:pt x="1790563" y="562080"/>
+                  </a:lnTo>
+                  <a:lnTo>
+                    <a:pt x="1718940" y="579396"/>
+                  </a:lnTo>
+                  <a:lnTo>
+                    <a:pt x="1647318" y="595570"/>
+                  </a:lnTo>
+                  <a:lnTo>
+                    <a:pt x="1575695" y="610678"/>
+                  </a:lnTo>
+                  <a:lnTo>
+                    <a:pt x="1504073" y="624790"/>
+                  </a:lnTo>
+                  <a:lnTo>
+                    <a:pt x="1432450" y="637970"/>
+                  </a:lnTo>
+                  <a:lnTo>
+                    <a:pt x="1360827" y="650282"/>
+                  </a:lnTo>
+                  <a:lnTo>
+                    <a:pt x="1289205" y="661782"/>
+                  </a:lnTo>
+                  <a:lnTo>
+                    <a:pt x="1217582" y="672523"/>
+                  </a:lnTo>
+                  <a:lnTo>
+                    <a:pt x="1145960" y="682556"/>
+                  </a:lnTo>
+                  <a:lnTo>
+                    <a:pt x="1074337" y="691928"/>
+                  </a:lnTo>
+                  <a:lnTo>
+                    <a:pt x="1002715" y="700681"/>
+                  </a:lnTo>
+                  <a:lnTo>
+                    <a:pt x="931092" y="708857"/>
+                  </a:lnTo>
+                  <a:lnTo>
+                    <a:pt x="859470" y="716494"/>
+                  </a:lnTo>
+                  <a:lnTo>
+                    <a:pt x="787847" y="723628"/>
+                  </a:lnTo>
+                  <a:lnTo>
+                    <a:pt x="716225" y="730290"/>
+                  </a:lnTo>
+                  <a:lnTo>
+                    <a:pt x="644602" y="736514"/>
+                  </a:lnTo>
+                  <a:lnTo>
+                    <a:pt x="572980" y="742327"/>
+                  </a:lnTo>
+                  <a:lnTo>
+                    <a:pt x="501357" y="747757"/>
+                  </a:lnTo>
+                  <a:lnTo>
+                    <a:pt x="429735" y="752829"/>
+                  </a:lnTo>
+                  <a:lnTo>
+                    <a:pt x="358112" y="757566"/>
+                  </a:lnTo>
+                  <a:lnTo>
+                    <a:pt x="286490" y="761991"/>
+                  </a:lnTo>
+                  <a:lnTo>
+                    <a:pt x="214867" y="766124"/>
+                  </a:lnTo>
+                  <a:lnTo>
+                    <a:pt x="143245" y="769984"/>
+                  </a:lnTo>
+                  <a:lnTo>
+                    <a:pt x="71622" y="773590"/>
+                  </a:lnTo>
+                  <a:lnTo>
+                    <a:pt x="0" y="776958"/>
                   </a:lnTo>
                 </a:path>
               </a:pathLst>
@@ -4415,309 +4415,309 @@
           </p:nvSpPr>
           <p:spPr>
             <a:xfrm>
-              <a:off x="1172049" y="3774263"/>
-              <a:ext cx="7090630" cy="1308676"/>
+              <a:off x="1172049" y="3775655"/>
+              <a:ext cx="7090630" cy="1307821"/>
             </a:xfrm>
             <a:custGeom>
               <a:avLst/>
               <a:pathLst>
-                <a:path w="7090630" h="1308676">
+                <a:path w="7090630" h="1307821">
                   <a:moveTo>
-                    <a:pt x="0" y="1308676"/>
+                    <a:pt x="0" y="1307821"/>
                   </a:moveTo>
                   <a:lnTo>
-                    <a:pt x="71622" y="1302289"/>
-                  </a:lnTo>
-                  <a:lnTo>
-                    <a:pt x="143245" y="1295816"/>
-                  </a:lnTo>
-                  <a:lnTo>
-                    <a:pt x="214867" y="1289256"/>
-                  </a:lnTo>
-                  <a:lnTo>
-                    <a:pt x="286490" y="1282608"/>
-                  </a:lnTo>
-                  <a:lnTo>
-                    <a:pt x="358112" y="1275870"/>
-                  </a:lnTo>
-                  <a:lnTo>
-                    <a:pt x="429735" y="1269042"/>
-                  </a:lnTo>
-                  <a:lnTo>
-                    <a:pt x="501357" y="1262121"/>
-                  </a:lnTo>
-                  <a:lnTo>
-                    <a:pt x="572980" y="1255108"/>
-                  </a:lnTo>
-                  <a:lnTo>
-                    <a:pt x="644602" y="1248000"/>
-                  </a:lnTo>
-                  <a:lnTo>
-                    <a:pt x="716225" y="1240796"/>
-                  </a:lnTo>
-                  <a:lnTo>
-                    <a:pt x="787847" y="1233495"/>
-                  </a:lnTo>
-                  <a:lnTo>
-                    <a:pt x="859470" y="1226096"/>
-                  </a:lnTo>
-                  <a:lnTo>
-                    <a:pt x="931092" y="1218597"/>
-                  </a:lnTo>
-                  <a:lnTo>
-                    <a:pt x="1002715" y="1210997"/>
-                  </a:lnTo>
-                  <a:lnTo>
-                    <a:pt x="1074337" y="1203295"/>
-                  </a:lnTo>
-                  <a:lnTo>
-                    <a:pt x="1145960" y="1195489"/>
-                  </a:lnTo>
-                  <a:lnTo>
-                    <a:pt x="1217582" y="1187578"/>
-                  </a:lnTo>
-                  <a:lnTo>
-                    <a:pt x="1289205" y="1179561"/>
-                  </a:lnTo>
-                  <a:lnTo>
-                    <a:pt x="1360827" y="1171436"/>
-                  </a:lnTo>
-                  <a:lnTo>
-                    <a:pt x="1432450" y="1163201"/>
-                  </a:lnTo>
-                  <a:lnTo>
-                    <a:pt x="1504073" y="1154855"/>
-                  </a:lnTo>
-                  <a:lnTo>
-                    <a:pt x="1575695" y="1146397"/>
-                  </a:lnTo>
-                  <a:lnTo>
-                    <a:pt x="1647318" y="1137825"/>
-                  </a:lnTo>
-                  <a:lnTo>
-                    <a:pt x="1718940" y="1129138"/>
-                  </a:lnTo>
-                  <a:lnTo>
-                    <a:pt x="1790563" y="1120333"/>
-                  </a:lnTo>
-                  <a:lnTo>
-                    <a:pt x="1862185" y="1111410"/>
-                  </a:lnTo>
-                  <a:lnTo>
-                    <a:pt x="1933808" y="1102367"/>
-                  </a:lnTo>
-                  <a:lnTo>
-                    <a:pt x="2005430" y="1093203"/>
-                  </a:lnTo>
-                  <a:lnTo>
-                    <a:pt x="2077053" y="1083914"/>
-                  </a:lnTo>
-                  <a:lnTo>
-                    <a:pt x="2148675" y="1074501"/>
-                  </a:lnTo>
-                  <a:lnTo>
-                    <a:pt x="2220298" y="1064961"/>
-                  </a:lnTo>
-                  <a:lnTo>
-                    <a:pt x="2291920" y="1055292"/>
-                  </a:lnTo>
-                  <a:lnTo>
-                    <a:pt x="2363543" y="1045494"/>
-                  </a:lnTo>
-                  <a:lnTo>
-                    <a:pt x="2435165" y="1035563"/>
-                  </a:lnTo>
-                  <a:lnTo>
-                    <a:pt x="2506788" y="1025499"/>
-                  </a:lnTo>
-                  <a:lnTo>
-                    <a:pt x="2578410" y="1015299"/>
-                  </a:lnTo>
-                  <a:lnTo>
-                    <a:pt x="2650033" y="1004962"/>
-                  </a:lnTo>
-                  <a:lnTo>
-                    <a:pt x="2721655" y="994485"/>
-                  </a:lnTo>
-                  <a:lnTo>
-                    <a:pt x="2793278" y="983868"/>
-                  </a:lnTo>
-                  <a:lnTo>
-                    <a:pt x="2864901" y="973107"/>
-                  </a:lnTo>
-                  <a:lnTo>
-                    <a:pt x="2936523" y="962202"/>
-                  </a:lnTo>
-                  <a:lnTo>
-                    <a:pt x="3008146" y="951149"/>
-                  </a:lnTo>
-                  <a:lnTo>
-                    <a:pt x="3079768" y="939948"/>
-                  </a:lnTo>
-                  <a:lnTo>
-                    <a:pt x="3151391" y="928597"/>
-                  </a:lnTo>
-                  <a:lnTo>
-                    <a:pt x="3223013" y="917092"/>
-                  </a:lnTo>
-                  <a:lnTo>
-                    <a:pt x="3294636" y="905432"/>
-                  </a:lnTo>
-                  <a:lnTo>
-                    <a:pt x="3366258" y="893615"/>
-                  </a:lnTo>
-                  <a:lnTo>
-                    <a:pt x="3437881" y="881640"/>
-                  </a:lnTo>
-                  <a:lnTo>
-                    <a:pt x="3509503" y="869503"/>
-                  </a:lnTo>
-                  <a:lnTo>
-                    <a:pt x="3581126" y="857202"/>
-                  </a:lnTo>
-                  <a:lnTo>
-                    <a:pt x="3652748" y="844736"/>
-                  </a:lnTo>
-                  <a:lnTo>
-                    <a:pt x="3724371" y="832102"/>
-                  </a:lnTo>
-                  <a:lnTo>
-                    <a:pt x="3795993" y="819298"/>
-                  </a:lnTo>
-                  <a:lnTo>
-                    <a:pt x="3867616" y="806322"/>
-                  </a:lnTo>
-                  <a:lnTo>
-                    <a:pt x="3939238" y="793170"/>
-                  </a:lnTo>
-                  <a:lnTo>
-                    <a:pt x="4010861" y="779842"/>
-                  </a:lnTo>
-                  <a:lnTo>
-                    <a:pt x="4082483" y="766334"/>
-                  </a:lnTo>
-                  <a:lnTo>
-                    <a:pt x="4154106" y="752645"/>
-                  </a:lnTo>
-                  <a:lnTo>
-                    <a:pt x="4225729" y="738771"/>
-                  </a:lnTo>
-                  <a:lnTo>
-                    <a:pt x="4297351" y="724710"/>
-                  </a:lnTo>
-                  <a:lnTo>
-                    <a:pt x="4368974" y="710460"/>
-                  </a:lnTo>
-                  <a:lnTo>
-                    <a:pt x="4440596" y="696017"/>
-                  </a:lnTo>
-                  <a:lnTo>
-                    <a:pt x="4512219" y="681381"/>
-                  </a:lnTo>
-                  <a:lnTo>
-                    <a:pt x="4583841" y="666547"/>
-                  </a:lnTo>
-                  <a:lnTo>
-                    <a:pt x="4655464" y="651514"/>
-                  </a:lnTo>
-                  <a:lnTo>
-                    <a:pt x="4727086" y="636278"/>
-                  </a:lnTo>
-                  <a:lnTo>
-                    <a:pt x="4798709" y="620837"/>
-                  </a:lnTo>
-                  <a:lnTo>
-                    <a:pt x="4870331" y="605188"/>
-                  </a:lnTo>
-                  <a:lnTo>
-                    <a:pt x="4941954" y="589329"/>
-                  </a:lnTo>
-                  <a:lnTo>
-                    <a:pt x="5013576" y="573256"/>
-                  </a:lnTo>
-                  <a:lnTo>
-                    <a:pt x="5085199" y="556966"/>
-                  </a:lnTo>
-                  <a:lnTo>
-                    <a:pt x="5156821" y="540457"/>
-                  </a:lnTo>
-                  <a:lnTo>
-                    <a:pt x="5228444" y="523726"/>
-                  </a:lnTo>
-                  <a:lnTo>
-                    <a:pt x="5300066" y="506770"/>
-                  </a:lnTo>
-                  <a:lnTo>
-                    <a:pt x="5371689" y="489585"/>
-                  </a:lnTo>
-                  <a:lnTo>
-                    <a:pt x="5443311" y="472168"/>
-                  </a:lnTo>
-                  <a:lnTo>
-                    <a:pt x="5514934" y="454518"/>
-                  </a:lnTo>
-                  <a:lnTo>
-                    <a:pt x="5586557" y="436629"/>
-                  </a:lnTo>
-                  <a:lnTo>
-                    <a:pt x="5658179" y="418500"/>
-                  </a:lnTo>
-                  <a:lnTo>
-                    <a:pt x="5729802" y="400127"/>
-                  </a:lnTo>
-                  <a:lnTo>
-                    <a:pt x="5801424" y="381506"/>
-                  </a:lnTo>
-                  <a:lnTo>
-                    <a:pt x="5873047" y="362634"/>
-                  </a:lnTo>
-                  <a:lnTo>
-                    <a:pt x="5944669" y="343509"/>
-                  </a:lnTo>
-                  <a:lnTo>
-                    <a:pt x="6016292" y="324125"/>
-                  </a:lnTo>
-                  <a:lnTo>
-                    <a:pt x="6087914" y="304481"/>
-                  </a:lnTo>
-                  <a:lnTo>
-                    <a:pt x="6159537" y="284572"/>
-                  </a:lnTo>
-                  <a:lnTo>
-                    <a:pt x="6231159" y="264396"/>
-                  </a:lnTo>
-                  <a:lnTo>
-                    <a:pt x="6302782" y="243947"/>
-                  </a:lnTo>
-                  <a:lnTo>
-                    <a:pt x="6374404" y="223223"/>
-                  </a:lnTo>
-                  <a:lnTo>
-                    <a:pt x="6446027" y="202220"/>
-                  </a:lnTo>
-                  <a:lnTo>
-                    <a:pt x="6517649" y="180935"/>
-                  </a:lnTo>
-                  <a:lnTo>
-                    <a:pt x="6589272" y="159362"/>
-                  </a:lnTo>
-                  <a:lnTo>
-                    <a:pt x="6660894" y="137499"/>
-                  </a:lnTo>
-                  <a:lnTo>
-                    <a:pt x="6732517" y="115342"/>
-                  </a:lnTo>
-                  <a:lnTo>
-                    <a:pt x="6804139" y="92887"/>
-                  </a:lnTo>
-                  <a:lnTo>
-                    <a:pt x="6875762" y="70129"/>
-                  </a:lnTo>
-                  <a:lnTo>
-                    <a:pt x="6947385" y="47064"/>
-                  </a:lnTo>
-                  <a:lnTo>
-                    <a:pt x="7019007" y="23689"/>
+                    <a:pt x="71622" y="1301440"/>
+                  </a:lnTo>
+                  <a:lnTo>
+                    <a:pt x="143245" y="1294973"/>
+                  </a:lnTo>
+                  <a:lnTo>
+                    <a:pt x="214867" y="1288419"/>
+                  </a:lnTo>
+                  <a:lnTo>
+                    <a:pt x="286490" y="1281776"/>
+                  </a:lnTo>
+                  <a:lnTo>
+                    <a:pt x="358112" y="1275044"/>
+                  </a:lnTo>
+                  <a:lnTo>
+                    <a:pt x="429735" y="1268221"/>
+                  </a:lnTo>
+                  <a:lnTo>
+                    <a:pt x="501357" y="1261306"/>
+                  </a:lnTo>
+                  <a:lnTo>
+                    <a:pt x="572980" y="1254299"/>
+                  </a:lnTo>
+                  <a:lnTo>
+                    <a:pt x="644602" y="1247197"/>
+                  </a:lnTo>
+                  <a:lnTo>
+                    <a:pt x="716225" y="1239999"/>
+                  </a:lnTo>
+                  <a:lnTo>
+                    <a:pt x="787847" y="1232704"/>
+                  </a:lnTo>
+                  <a:lnTo>
+                    <a:pt x="859470" y="1225311"/>
+                  </a:lnTo>
+                  <a:lnTo>
+                    <a:pt x="931092" y="1217818"/>
+                  </a:lnTo>
+                  <a:lnTo>
+                    <a:pt x="1002715" y="1210225"/>
+                  </a:lnTo>
+                  <a:lnTo>
+                    <a:pt x="1074337" y="1202529"/>
+                  </a:lnTo>
+                  <a:lnTo>
+                    <a:pt x="1145960" y="1194729"/>
+                  </a:lnTo>
+                  <a:lnTo>
+                    <a:pt x="1217582" y="1186825"/>
+                  </a:lnTo>
+                  <a:lnTo>
+                    <a:pt x="1289205" y="1178814"/>
+                  </a:lnTo>
+                  <a:lnTo>
+                    <a:pt x="1360827" y="1170695"/>
+                  </a:lnTo>
+                  <a:lnTo>
+                    <a:pt x="1432450" y="1162467"/>
+                  </a:lnTo>
+                  <a:lnTo>
+                    <a:pt x="1504073" y="1154128"/>
+                  </a:lnTo>
+                  <a:lnTo>
+                    <a:pt x="1575695" y="1145676"/>
+                  </a:lnTo>
+                  <a:lnTo>
+                    <a:pt x="1647318" y="1137111"/>
+                  </a:lnTo>
+                  <a:lnTo>
+                    <a:pt x="1718940" y="1128431"/>
+                  </a:lnTo>
+                  <a:lnTo>
+                    <a:pt x="1790563" y="1119633"/>
+                  </a:lnTo>
+                  <a:lnTo>
+                    <a:pt x="1862185" y="1110717"/>
+                  </a:lnTo>
+                  <a:lnTo>
+                    <a:pt x="1933808" y="1101681"/>
+                  </a:lnTo>
+                  <a:lnTo>
+                    <a:pt x="2005430" y="1092523"/>
+                  </a:lnTo>
+                  <a:lnTo>
+                    <a:pt x="2077053" y="1083242"/>
+                  </a:lnTo>
+                  <a:lnTo>
+                    <a:pt x="2148675" y="1073836"/>
+                  </a:lnTo>
+                  <a:lnTo>
+                    <a:pt x="2220298" y="1064303"/>
+                  </a:lnTo>
+                  <a:lnTo>
+                    <a:pt x="2291920" y="1054642"/>
+                  </a:lnTo>
+                  <a:lnTo>
+                    <a:pt x="2363543" y="1044851"/>
+                  </a:lnTo>
+                  <a:lnTo>
+                    <a:pt x="2435165" y="1034927"/>
+                  </a:lnTo>
+                  <a:lnTo>
+                    <a:pt x="2506788" y="1024870"/>
+                  </a:lnTo>
+                  <a:lnTo>
+                    <a:pt x="2578410" y="1014678"/>
+                  </a:lnTo>
+                  <a:lnTo>
+                    <a:pt x="2650033" y="1004349"/>
+                  </a:lnTo>
+                  <a:lnTo>
+                    <a:pt x="2721655" y="993880"/>
+                  </a:lnTo>
+                  <a:lnTo>
+                    <a:pt x="2793278" y="983270"/>
+                  </a:lnTo>
+                  <a:lnTo>
+                    <a:pt x="2864901" y="972517"/>
+                  </a:lnTo>
+                  <a:lnTo>
+                    <a:pt x="2936523" y="961620"/>
+                  </a:lnTo>
+                  <a:lnTo>
+                    <a:pt x="3008146" y="950576"/>
+                  </a:lnTo>
+                  <a:lnTo>
+                    <a:pt x="3079768" y="939382"/>
+                  </a:lnTo>
+                  <a:lnTo>
+                    <a:pt x="3151391" y="928039"/>
+                  </a:lnTo>
+                  <a:lnTo>
+                    <a:pt x="3223013" y="916542"/>
+                  </a:lnTo>
+                  <a:lnTo>
+                    <a:pt x="3294636" y="904891"/>
+                  </a:lnTo>
+                  <a:lnTo>
+                    <a:pt x="3366258" y="893082"/>
+                  </a:lnTo>
+                  <a:lnTo>
+                    <a:pt x="3437881" y="881115"/>
+                  </a:lnTo>
+                  <a:lnTo>
+                    <a:pt x="3509503" y="868986"/>
+                  </a:lnTo>
+                  <a:lnTo>
+                    <a:pt x="3581126" y="856694"/>
+                  </a:lnTo>
+                  <a:lnTo>
+                    <a:pt x="3652748" y="844237"/>
+                  </a:lnTo>
+                  <a:lnTo>
+                    <a:pt x="3724371" y="831611"/>
+                  </a:lnTo>
+                  <a:lnTo>
+                    <a:pt x="3795993" y="818816"/>
+                  </a:lnTo>
+                  <a:lnTo>
+                    <a:pt x="3867616" y="805848"/>
+                  </a:lnTo>
+                  <a:lnTo>
+                    <a:pt x="3939238" y="792706"/>
+                  </a:lnTo>
+                  <a:lnTo>
+                    <a:pt x="4010861" y="779387"/>
+                  </a:lnTo>
+                  <a:lnTo>
+                    <a:pt x="4082483" y="765888"/>
+                  </a:lnTo>
+                  <a:lnTo>
+                    <a:pt x="4154106" y="752207"/>
+                  </a:lnTo>
+                  <a:lnTo>
+                    <a:pt x="4225729" y="738342"/>
+                  </a:lnTo>
+                  <a:lnTo>
+                    <a:pt x="4297351" y="724291"/>
+                  </a:lnTo>
+                  <a:lnTo>
+                    <a:pt x="4368974" y="710050"/>
+                  </a:lnTo>
+                  <a:lnTo>
+                    <a:pt x="4440596" y="695617"/>
+                  </a:lnTo>
+                  <a:lnTo>
+                    <a:pt x="4512219" y="680990"/>
+                  </a:lnTo>
+                  <a:lnTo>
+                    <a:pt x="4583841" y="666166"/>
+                  </a:lnTo>
+                  <a:lnTo>
+                    <a:pt x="4655464" y="651142"/>
+                  </a:lnTo>
+                  <a:lnTo>
+                    <a:pt x="4727086" y="635916"/>
+                  </a:lnTo>
+                  <a:lnTo>
+                    <a:pt x="4798709" y="620485"/>
+                  </a:lnTo>
+                  <a:lnTo>
+                    <a:pt x="4870331" y="604846"/>
+                  </a:lnTo>
+                  <a:lnTo>
+                    <a:pt x="4941954" y="588996"/>
+                  </a:lnTo>
+                  <a:lnTo>
+                    <a:pt x="5013576" y="572933"/>
+                  </a:lnTo>
+                  <a:lnTo>
+                    <a:pt x="5085199" y="556653"/>
+                  </a:lnTo>
+                  <a:lnTo>
+                    <a:pt x="5156821" y="540155"/>
+                  </a:lnTo>
+                  <a:lnTo>
+                    <a:pt x="5228444" y="523434"/>
+                  </a:lnTo>
+                  <a:lnTo>
+                    <a:pt x="5300066" y="506487"/>
+                  </a:lnTo>
+                  <a:lnTo>
+                    <a:pt x="5371689" y="489313"/>
+                  </a:lnTo>
+                  <a:lnTo>
+                    <a:pt x="5443311" y="471907"/>
+                  </a:lnTo>
+                  <a:lnTo>
+                    <a:pt x="5514934" y="454267"/>
+                  </a:lnTo>
+                  <a:lnTo>
+                    <a:pt x="5586557" y="436389"/>
+                  </a:lnTo>
+                  <a:lnTo>
+                    <a:pt x="5658179" y="418270"/>
+                  </a:lnTo>
+                  <a:lnTo>
+                    <a:pt x="5729802" y="399908"/>
+                  </a:lnTo>
+                  <a:lnTo>
+                    <a:pt x="5801424" y="381298"/>
+                  </a:lnTo>
+                  <a:lnTo>
+                    <a:pt x="5873047" y="362437"/>
+                  </a:lnTo>
+                  <a:lnTo>
+                    <a:pt x="5944669" y="343322"/>
+                  </a:lnTo>
+                  <a:lnTo>
+                    <a:pt x="6016292" y="323950"/>
+                  </a:lnTo>
+                  <a:lnTo>
+                    <a:pt x="6087914" y="304317"/>
+                  </a:lnTo>
+                  <a:lnTo>
+                    <a:pt x="6159537" y="284419"/>
+                  </a:lnTo>
+                  <a:lnTo>
+                    <a:pt x="6231159" y="264254"/>
+                  </a:lnTo>
+                  <a:lnTo>
+                    <a:pt x="6302782" y="243817"/>
+                  </a:lnTo>
+                  <a:lnTo>
+                    <a:pt x="6374404" y="223104"/>
+                  </a:lnTo>
+                  <a:lnTo>
+                    <a:pt x="6446027" y="202113"/>
+                  </a:lnTo>
+                  <a:lnTo>
+                    <a:pt x="6517649" y="180839"/>
+                  </a:lnTo>
+                  <a:lnTo>
+                    <a:pt x="6589272" y="159278"/>
+                  </a:lnTo>
+                  <a:lnTo>
+                    <a:pt x="6660894" y="137427"/>
+                  </a:lnTo>
+                  <a:lnTo>
+                    <a:pt x="6732517" y="115282"/>
+                  </a:lnTo>
+                  <a:lnTo>
+                    <a:pt x="6804139" y="92838"/>
+                  </a:lnTo>
+                  <a:lnTo>
+                    <a:pt x="6875762" y="70092"/>
+                  </a:lnTo>
+                  <a:lnTo>
+                    <a:pt x="6947385" y="47040"/>
+                  </a:lnTo>
+                  <a:lnTo>
+                    <a:pt x="7019007" y="23677"/>
                   </a:lnTo>
                   <a:lnTo>
                     <a:pt x="7090630" y="0"/>
@@ -4792,7 +4792,7 @@
           </p:nvSpPr>
           <p:spPr>
             <a:xfrm>
-              <a:off x="4164901" y="2073503"/>
+              <a:off x="4170171" y="2073503"/>
               <a:ext cx="0" cy="3649639"/>
             </a:xfrm>
             <a:custGeom>
@@ -5065,7 +5065,7 @@
           </p:nvSpPr>
           <p:spPr>
             <a:xfrm>
-              <a:off x="1382692" y="5785772"/>
+              <a:off x="1383511" y="5785772"/>
               <a:ext cx="161574" cy="80101"/>
             </a:xfrm>
             <a:prstGeom prst="rect">
@@ -5111,7 +5111,7 @@
           </p:nvSpPr>
           <p:spPr>
             <a:xfrm>
-              <a:off x="2284877" y="5785772"/>
+              <a:off x="2285456" y="5785772"/>
               <a:ext cx="161574" cy="80101"/>
             </a:xfrm>
             <a:prstGeom prst="rect">
@@ -5157,7 +5157,7 @@
           </p:nvSpPr>
           <p:spPr>
             <a:xfrm>
-              <a:off x="3187061" y="5785772"/>
+              <a:off x="3187401" y="5785772"/>
               <a:ext cx="161574" cy="80101"/>
             </a:xfrm>
             <a:prstGeom prst="rect">
@@ -5203,7 +5203,7 @@
           </p:nvSpPr>
           <p:spPr>
             <a:xfrm>
-              <a:off x="4138944" y="5785772"/>
+              <a:off x="4139043" y="5785772"/>
               <a:ext cx="62179" cy="80101"/>
             </a:xfrm>
             <a:prstGeom prst="rect">
@@ -5249,7 +5249,7 @@
           </p:nvSpPr>
           <p:spPr>
             <a:xfrm>
-              <a:off x="5010039" y="5785772"/>
+              <a:off x="5009898" y="5785772"/>
               <a:ext cx="124358" cy="80101"/>
             </a:xfrm>
             <a:prstGeom prst="rect">
@@ -5295,7 +5295,7 @@
           </p:nvSpPr>
           <p:spPr>
             <a:xfrm>
-              <a:off x="5912223" y="5785772"/>
+              <a:off x="5911843" y="5785772"/>
               <a:ext cx="124358" cy="80101"/>
             </a:xfrm>
             <a:prstGeom prst="rect">
@@ -5341,7 +5341,7 @@
           </p:nvSpPr>
           <p:spPr>
             <a:xfrm>
-              <a:off x="6814408" y="5785772"/>
+              <a:off x="6813788" y="5785772"/>
               <a:ext cx="124358" cy="80101"/>
             </a:xfrm>
             <a:prstGeom prst="rect">
@@ -5387,7 +5387,7 @@
           </p:nvSpPr>
           <p:spPr>
             <a:xfrm>
-              <a:off x="7716592" y="5785772"/>
+              <a:off x="7715733" y="5785772"/>
               <a:ext cx="124358" cy="80101"/>
             </a:xfrm>
             <a:prstGeom prst="rect">
@@ -5558,7 +5558,7 @@
                   <a:latin typeface="Helvetica"/>
                   <a:cs typeface="Helvetica"/>
                 </a:rPr>
-                <a:t>subHR per 10 % decline: 0.84 (0.42-1.69), p_Bonf = 1.000 (n = 6)  |  per IQR decline (Δ = 27.4 %): 0.63 (0.09-4.19)  |  IQR: [-12.6, 14.8] %</a:t>
+                <a:t>subHR per 10 % decline: 0.84 (0.42-1.69), p_Bonf = 1.000 (n = 6)  |  per IQR decline (Δ = 27.2 %): 0.63 (0.10-4.14)  |  IQR: [-12.3, 14.9] %</a:t>
               </a:r>
             </a:p>
           </p:txBody>
